--- a/docs/gemma_qlora_core_concepts.pptx
+++ b/docs/gemma_qlora_core_concepts.pptx
@@ -3146,8 +3146,8 @@
         </p:nvSpPr>
         <p:spPr>
           <a:xfrm>
-            <a:off x="640080" y="1188720"/>
-            <a:ext cx="109728" cy="4389120"/>
+            <a:off x="731520" y="1280160"/>
+            <a:ext cx="109728" cy="4297680"/>
           </a:xfrm>
           <a:prstGeom prst="rect">
             <a:avLst/>
@@ -3189,8 +3189,8 @@
         </p:nvSpPr>
         <p:spPr>
           <a:xfrm>
-            <a:off x="1005840" y="1188720"/>
-            <a:ext cx="10332720" cy="4389120"/>
+            <a:off x="1097280" y="1280160"/>
+            <a:ext cx="10241280" cy="4297680"/>
           </a:xfrm>
           <a:prstGeom prst="rect">
             <a:avLst/>
@@ -3205,25 +3205,25 @@
           <a:p>
             <a:pPr>
               <a:spcAft>
+                <a:spcPts val="1200"/>
+              </a:spcAft>
+              <a:defRPr sz="1500" b="1">
+                <a:solidFill>
+                  <a:srgbClr val="2DD4BF"/>
+                </a:solidFill>
+                <a:latin typeface="Calibri"/>
+              </a:defRPr>
+            </a:pPr>
+            <a:r>
+              <a:t>PARAMETER-EFFICIENT LLM ADAPTATION</a:t>
+            </a:r>
+          </a:p>
+          <a:p>
+            <a:pPr>
+              <a:spcAft>
                 <a:spcPts val="1000"/>
               </a:spcAft>
-              <a:defRPr sz="1400" b="1">
-                <a:solidFill>
-                  <a:srgbClr val="2DD4BF"/>
-                </a:solidFill>
-                <a:latin typeface="Calibri"/>
-              </a:defRPr>
-            </a:pPr>
-            <a:r>
-              <a:t>PARAMETER-EFFICIENT LLM ADAPTATION</a:t>
-            </a:r>
-          </a:p>
-          <a:p>
-            <a:pPr>
-              <a:spcAft>
-                <a:spcPts val="800"/>
-              </a:spcAft>
-              <a:defRPr sz="3600" b="1">
+              <a:defRPr sz="3800" b="1">
                 <a:solidFill>
                   <a:srgbClr val="FFFFFF"/>
                 </a:solidFill>
@@ -3231,15 +3231,12 @@
               </a:defRPr>
             </a:pPr>
             <a:r>
-              <a:t>Fine-Tuning Gemma-2-2B-IT with LoRA &amp; 4-bit QLoRA</a:t>
-            </a:r>
-          </a:p>
-          <a:p>
-            <a:pPr>
-              <a:spcAft>
-                <a:spcPts val="2800"/>
-              </a:spcAft>
-              <a:defRPr sz="1800">
+              <a:t>Fine-Tuning Gemma-2-2B-IT with LoRA &amp; QLoRA</a:t>
+            </a:r>
+          </a:p>
+          <a:p>
+            <a:pPr>
+              <a:defRPr sz="2000">
                 <a:solidFill>
                   <a:srgbClr val="94A3B8"/>
                 </a:solidFill>
@@ -3247,7 +3244,7 @@
               </a:defRPr>
             </a:pPr>
             <a:r>
-              <a:t>Core Concepts: Instruction Data, Low-Rank Adapters (LoRA), and 4-bit NF4 Quantization on GermEval 2017</a:t>
+              <a:t>Core Concepts: Instruction Data, Low-Rank Adapters, and 4-bit Quantization</a:t>
             </a:r>
           </a:p>
         </p:txBody>
@@ -3260,8 +3257,8 @@
         </p:nvSpPr>
         <p:spPr>
           <a:xfrm>
-            <a:off x="1005840" y="4069080"/>
-            <a:ext cx="3291840" cy="1508760"/>
+            <a:off x="1097280" y="4023360"/>
+            <a:ext cx="3246120" cy="1508760"/>
           </a:xfrm>
           <a:prstGeom prst="roundRect">
             <a:avLst>
@@ -3292,14 +3289,14 @@
           </a:fontRef>
         </p:style>
         <p:txBody>
-          <a:bodyPr rtlCol="0" anchor="ctr" wrap="square" lIns="164592" rIns="164592" tIns="146304"/>
+          <a:bodyPr rtlCol="0" anchor="ctr" wrap="square" lIns="182880" rIns="182880" tIns="182880"/>
           <a:lstStyle/>
           <a:p>
             <a:pPr algn="ctr">
               <a:spcAft>
-                <a:spcPts val="600"/>
+                <a:spcPts val="800"/>
               </a:spcAft>
-              <a:defRPr sz="1200" b="1">
+              <a:defRPr sz="1300" b="1">
                 <a:solidFill>
                   <a:srgbClr val="2563EB"/>
                 </a:solidFill>
@@ -3312,7 +3309,7 @@
           </a:p>
           <a:p>
             <a:pPr>
-              <a:defRPr sz="1250">
+              <a:defRPr sz="1400">
                 <a:solidFill>
                   <a:srgbClr val="FFFFFF"/>
                 </a:solidFill>
@@ -3320,11 +3317,11 @@
               </a:defRPr>
             </a:pPr>
             <a:r>
-              <a:t>26,209 German Customer Reviews</a:t>
+              <a:t>GermEval 2017 Reviews → JSON</a:t>
             </a:r>
             <a:br/>
             <a:r>
-              <a:t>JSON Schema + Completion-Only Loss</a:t>
+              <a:t>Completion-Only Loss (-100)</a:t>
             </a:r>
           </a:p>
         </p:txBody>
@@ -3337,8 +3334,8 @@
         </p:nvSpPr>
         <p:spPr>
           <a:xfrm>
-            <a:off x="4526280" y="4069080"/>
-            <a:ext cx="3291840" cy="1508760"/>
+            <a:off x="4572000" y="4023360"/>
+            <a:ext cx="3246120" cy="1508760"/>
           </a:xfrm>
           <a:prstGeom prst="roundRect">
             <a:avLst>
@@ -3369,14 +3366,14 @@
           </a:fontRef>
         </p:style>
         <p:txBody>
-          <a:bodyPr rtlCol="0" anchor="ctr" wrap="square" lIns="164592" rIns="164592" tIns="146304"/>
+          <a:bodyPr rtlCol="0" anchor="ctr" wrap="square" lIns="182880" rIns="182880" tIns="182880"/>
           <a:lstStyle/>
           <a:p>
             <a:pPr algn="ctr">
               <a:spcAft>
-                <a:spcPts val="600"/>
+                <a:spcPts val="800"/>
               </a:spcAft>
-              <a:defRPr sz="1200" b="1">
+              <a:defRPr sz="1300" b="1">
                 <a:solidFill>
                   <a:srgbClr val="0D9488"/>
                 </a:solidFill>
@@ -3389,7 +3386,7 @@
           </a:p>
           <a:p>
             <a:pPr>
-              <a:defRPr sz="1250">
+              <a:defRPr sz="1400">
                 <a:solidFill>
                   <a:srgbClr val="FFFFFF"/>
                 </a:solidFill>
@@ -3397,11 +3394,11 @@
               </a:defRPr>
             </a:pPr>
             <a:r>
-              <a:t>Freeze 2.61B Base Weights (99.21%)</a:t>
+              <a:t>Freeze 99.2% Base Weights</a:t>
             </a:r>
             <a:br/>
             <a:r>
-              <a:t>Train Only 20.8M Rank-16 Weights (0.79%)</a:t>
+              <a:t>Train Only 0.8% Rank-16 Weights</a:t>
             </a:r>
           </a:p>
         </p:txBody>
@@ -3414,8 +3411,8 @@
         </p:nvSpPr>
         <p:spPr>
           <a:xfrm>
-            <a:off x="8046720" y="4069080"/>
-            <a:ext cx="3291840" cy="1508760"/>
+            <a:off x="8046719" y="4023360"/>
+            <a:ext cx="3246120" cy="1508760"/>
           </a:xfrm>
           <a:prstGeom prst="roundRect">
             <a:avLst>
@@ -3446,14 +3443,14 @@
           </a:fontRef>
         </p:style>
         <p:txBody>
-          <a:bodyPr rtlCol="0" anchor="ctr" wrap="square" lIns="164592" rIns="164592" tIns="146304"/>
+          <a:bodyPr rtlCol="0" anchor="ctr" wrap="square" lIns="182880" rIns="182880" tIns="182880"/>
           <a:lstStyle/>
           <a:p>
             <a:pPr algn="ctr">
               <a:spcAft>
-                <a:spcPts val="600"/>
+                <a:spcPts val="800"/>
               </a:spcAft>
-              <a:defRPr sz="1200" b="1">
+              <a:defRPr sz="1300" b="1">
                 <a:solidFill>
                   <a:srgbClr val="D97706"/>
                 </a:solidFill>
@@ -3461,12 +3458,12 @@
               </a:defRPr>
             </a:pPr>
             <a:r>
-              <a:t>3. 4-BIT NF4 QUANTIZATION (QLoRA)</a:t>
-            </a:r>
-          </a:p>
-          <a:p>
-            <a:pPr>
-              <a:defRPr sz="1250">
+              <a:t>3. 4-BIT QUANTIZATION (QLoRA)</a:t>
+            </a:r>
+          </a:p>
+          <a:p>
+            <a:pPr>
+              <a:defRPr sz="1400">
                 <a:solidFill>
                   <a:srgbClr val="FFFFFF"/>
                 </a:solidFill>
@@ -3474,11 +3471,11 @@
               </a:defRPr>
             </a:pPr>
             <a:r>
-              <a:t>72% Base Weight Compression (1.4 GB)</a:t>
+              <a:t>72% Base Weight Compression</a:t>
             </a:r>
             <a:br/>
             <a:r>
-              <a:t>Runs on Free Colab T4 / L4 GPUs</a:t>
+              <a:t>Trains in 2.9 GB VRAM on Colab</a:t>
             </a:r>
           </a:p>
         </p:txBody>
@@ -3552,8 +3549,8 @@
         </p:nvSpPr>
         <p:spPr>
           <a:xfrm>
-            <a:off x="548640" y="228600"/>
-            <a:ext cx="10241280" cy="777240"/>
+            <a:off x="640080" y="256032"/>
+            <a:ext cx="10058400" cy="868680"/>
           </a:xfrm>
           <a:prstGeom prst="rect">
             <a:avLst/>
@@ -3567,7 +3564,7 @@
           <a:lstStyle/>
           <a:p>
             <a:pPr>
-              <a:defRPr sz="2600" b="1">
+              <a:defRPr sz="2800" b="1">
                 <a:solidFill>
                   <a:srgbClr val="0F172A"/>
                 </a:solidFill>
@@ -3575,12 +3572,12 @@
               </a:defRPr>
             </a:pPr>
             <a:r>
-              <a:t>1. Motivation: Prompting vs. Parameter-Efficient Fine-Tuning (PEFT)</a:t>
-            </a:r>
-          </a:p>
-          <a:p>
-            <a:pPr>
-              <a:defRPr sz="1350">
+              <a:t>1. Motivation: Why Parameter-Efficient Fine-Tuning?</a:t>
+            </a:r>
+          </a:p>
+          <a:p>
+            <a:pPr>
+              <a:defRPr sz="1500">
                 <a:solidFill>
                   <a:srgbClr val="64748B"/>
                 </a:solidFill>
@@ -3588,7 +3585,7 @@
               </a:defRPr>
             </a:pPr>
             <a:r>
-              <a:t>Why adapt a compact 2.6B open-weights model (google/gemma-2-2b-it) instead of relying on Zero/Few-Shot prompting?</a:t>
+              <a:t>Comparing Prompting, Full Fine-Tuning, and LoRA/QLoRA on Gemma-2-2B-IT</a:t>
             </a:r>
           </a:p>
         </p:txBody>
@@ -3601,8 +3598,8 @@
         </p:nvSpPr>
         <p:spPr>
           <a:xfrm>
-            <a:off x="10789920" y="274320"/>
-            <a:ext cx="914400" cy="365760"/>
+            <a:off x="10698480" y="292608"/>
+            <a:ext cx="868680" cy="365760"/>
           </a:xfrm>
           <a:prstGeom prst="rect">
             <a:avLst/>
@@ -3616,7 +3613,7 @@
           <a:lstStyle/>
           <a:p>
             <a:pPr algn="r">
-              <a:defRPr sz="1200" b="1">
+              <a:defRPr sz="1300" b="1">
                 <a:solidFill>
                   <a:srgbClr val="64748B"/>
                 </a:solidFill>
@@ -3637,8 +3634,8 @@
         </p:nvSpPr>
         <p:spPr>
           <a:xfrm>
-            <a:off x="548640" y="1078992"/>
-            <a:ext cx="11094415" cy="18288"/>
+            <a:off x="640080" y="1170432"/>
+            <a:ext cx="10911535" cy="18288"/>
           </a:xfrm>
           <a:prstGeom prst="rect">
             <a:avLst/>
@@ -3680,12 +3677,12 @@
         </p:nvSpPr>
         <p:spPr>
           <a:xfrm>
-            <a:off x="548640" y="1280160"/>
-            <a:ext cx="5394960" cy="2423160"/>
+            <a:off x="640080" y="1463040"/>
+            <a:ext cx="3474720" cy="4754880"/>
           </a:xfrm>
           <a:prstGeom prst="roundRect">
             <a:avLst>
-              <a:gd name="adj" fmla="val 2000"/>
+              <a:gd name="adj" fmla="val 2500"/>
             </a:avLst>
           </a:prstGeom>
           <a:solidFill>
@@ -3727,8 +3724,8 @@
         </p:nvSpPr>
         <p:spPr>
           <a:xfrm>
-            <a:off x="548640" y="1353312"/>
-            <a:ext cx="73152" cy="2276856"/>
+            <a:off x="640080" y="1554480"/>
+            <a:ext cx="82296" cy="4572000"/>
           </a:xfrm>
           <a:prstGeom prst="rect">
             <a:avLst/>
@@ -3770,8 +3767,8 @@
         </p:nvSpPr>
         <p:spPr>
           <a:xfrm>
-            <a:off x="749808" y="1408176"/>
-            <a:ext cx="5074920" cy="2203704"/>
+            <a:off x="896112" y="1645920"/>
+            <a:ext cx="3063239" cy="4434840"/>
           </a:xfrm>
           <a:prstGeom prst="rect">
             <a:avLst/>
@@ -3786,9 +3783,9 @@
           <a:p>
             <a:pPr>
               <a:spcAft>
-                <a:spcPts val="600"/>
+                <a:spcPts val="1000"/>
               </a:spcAft>
-              <a:defRPr sz="1600" b="1">
+              <a:defRPr sz="1900" b="1">
                 <a:solidFill>
                   <a:srgbClr val="334155"/>
                 </a:solidFill>
@@ -3796,91 +3793,91 @@
               </a:defRPr>
             </a:pPr>
             <a:r>
-              <a:t>The Limits of In-Context Prompting (Zero / Few-Shot)</a:t>
+              <a:t>In-Context Prompting</a:t>
             </a:r>
           </a:p>
           <a:p>
             <a:pPr>
               <a:spcAft>
-                <a:spcPts val="400"/>
+                <a:spcPts val="800"/>
               </a:spcAft>
               <a:defRPr>
                 <a:latin typeface="Calibri"/>
               </a:defRPr>
             </a:pPr>
             <a:r>
-              <a:rPr b="1" sz="1300">
+              <a:rPr b="1" sz="1500">
                 <a:solidFill>
                   <a:srgbClr val="0F172A"/>
                 </a:solidFill>
                 <a:latin typeface="Calibri"/>
               </a:rPr>
-              <a:t>• Taxonomy Ambiguity: </a:t>
-            </a:r>
-            <a:r>
-              <a:rPr b="0" sz="1300">
+              <a:t>• Hard Domain Rules: </a:t>
+            </a:r>
+            <a:r>
+              <a:rPr b="0" sz="1500">
                 <a:solidFill>
                   <a:srgbClr val="334155"/>
                 </a:solidFill>
                 <a:latin typeface="Calibri"/>
               </a:rPr>
-              <a:t>19 domain-specific German aspect categories (Allgemein, Zugfahrt, Pünktlichkeit, Sicherheit...) require exact boundary rules.</a:t>
+              <a:t>19 German aspect categories have subtle annotation boundaries.</a:t>
             </a:r>
           </a:p>
           <a:p>
             <a:pPr>
               <a:spcAft>
-                <a:spcPts val="400"/>
+                <a:spcPts val="800"/>
               </a:spcAft>
               <a:defRPr>
                 <a:latin typeface="Calibri"/>
               </a:defRPr>
             </a:pPr>
             <a:r>
-              <a:rPr b="1" sz="1300">
+              <a:rPr b="1" sz="1500">
                 <a:solidFill>
                   <a:srgbClr val="0F172A"/>
                 </a:solidFill>
                 <a:latin typeface="Calibri"/>
               </a:rPr>
-              <a:t>• Multi-Label Calibration: </a:t>
-            </a:r>
-            <a:r>
-              <a:rPr b="0" sz="1300">
+              <a:t>• Uncalibrated Output: </a:t>
+            </a:r>
+            <a:r>
+              <a:rPr b="0" sz="1500">
                 <a:solidFill>
                   <a:srgbClr val="334155"/>
                 </a:solidFill>
                 <a:latin typeface="Calibri"/>
               </a:rPr>
-              <a:t>Zero-shot models over-predict or under-predict empty sets (relevance=false -&gt; {"labels": []}).</a:t>
+              <a:t>Zero-shot struggles with multi-label sets and out-of-domain posts.</a:t>
             </a:r>
           </a:p>
           <a:p>
             <a:pPr>
               <a:spcAft>
-                <a:spcPts val="400"/>
+                <a:spcPts val="800"/>
               </a:spcAft>
               <a:defRPr>
                 <a:latin typeface="Calibri"/>
               </a:defRPr>
             </a:pPr>
             <a:r>
-              <a:rPr b="1" sz="1300">
+              <a:rPr b="1" sz="1500">
                 <a:solidFill>
                   <a:srgbClr val="0F172A"/>
                 </a:solidFill>
                 <a:latin typeface="Calibri"/>
               </a:rPr>
-              <a:t>• Inference Token Overhead: </a:t>
-            </a:r>
-            <a:r>
-              <a:rPr b="0" sz="1300">
+              <a:t>• Slow Few-Shot: </a:t>
+            </a:r>
+            <a:r>
+              <a:rPr b="0" sz="1500">
                 <a:solidFill>
                   <a:srgbClr val="334155"/>
                 </a:solidFill>
                 <a:latin typeface="Calibri"/>
               </a:rPr>
-              <a:t>10-shot prompting prepends ~1,500 tokens to EVERY single test document, doubling latency and KV-cache memory.</a:t>
+              <a:t>10-shot adds ~1,500 tokens to every query (2x slower inference).</a:t>
             </a:r>
           </a:p>
         </p:txBody>
@@ -3893,12 +3890,12 @@
         </p:nvSpPr>
         <p:spPr>
           <a:xfrm>
-            <a:off x="6217920" y="1280160"/>
-            <a:ext cx="5394960" cy="2423160"/>
+            <a:off x="4343400" y="1463040"/>
+            <a:ext cx="3474720" cy="4754880"/>
           </a:xfrm>
           <a:prstGeom prst="roundRect">
             <a:avLst>
-              <a:gd name="adj" fmla="val 2000"/>
+              <a:gd name="adj" fmla="val 2500"/>
             </a:avLst>
           </a:prstGeom>
           <a:solidFill>
@@ -3940,8 +3937,8 @@
         </p:nvSpPr>
         <p:spPr>
           <a:xfrm>
-            <a:off x="6217920" y="1353312"/>
-            <a:ext cx="73152" cy="2276856"/>
+            <a:off x="4343400" y="1554480"/>
+            <a:ext cx="82296" cy="4572000"/>
           </a:xfrm>
           <a:prstGeom prst="rect">
             <a:avLst/>
@@ -3983,8 +3980,8 @@
         </p:nvSpPr>
         <p:spPr>
           <a:xfrm>
-            <a:off x="6419088" y="1408176"/>
-            <a:ext cx="5074920" cy="2203704"/>
+            <a:off x="4599432" y="1645920"/>
+            <a:ext cx="3063239" cy="4434840"/>
           </a:xfrm>
           <a:prstGeom prst="rect">
             <a:avLst/>
@@ -3999,9 +3996,9 @@
           <a:p>
             <a:pPr>
               <a:spcAft>
-                <a:spcPts val="600"/>
+                <a:spcPts val="1000"/>
               </a:spcAft>
-              <a:defRPr sz="1600" b="1">
+              <a:defRPr sz="1900" b="1">
                 <a:solidFill>
                   <a:srgbClr val="D97706"/>
                 </a:solidFill>
@@ -4009,48 +4006,48 @@
               </a:defRPr>
             </a:pPr>
             <a:r>
-              <a:t>Why Full Fine-Tuning Is Impractical for LLMs</a:t>
+              <a:t>Full Fine-Tuning</a:t>
             </a:r>
           </a:p>
           <a:p>
             <a:pPr>
               <a:spcAft>
-                <a:spcPts val="400"/>
+                <a:spcPts val="800"/>
               </a:spcAft>
               <a:defRPr>
                 <a:latin typeface="Calibri"/>
               </a:defRPr>
             </a:pPr>
             <a:r>
-              <a:rPr b="1" sz="1300">
+              <a:rPr b="1" sz="1500">
                 <a:solidFill>
                   <a:srgbClr val="0F172A"/>
                 </a:solidFill>
                 <a:latin typeface="Calibri"/>
               </a:rPr>
-              <a:t>• High Memory Footprint: </a:t>
-            </a:r>
-            <a:r>
-              <a:rPr b="0" sz="1300">
+              <a:t>• &gt;32 GB VRAM Needed: </a:t>
+            </a:r>
+            <a:r>
+              <a:rPr b="0" sz="1500">
                 <a:solidFill>
                   <a:srgbClr val="334155"/>
                 </a:solidFill>
                 <a:latin typeface="Calibri"/>
               </a:rPr>
-              <a:t>Updating all 2.61B parameters in 16-bit AdamW requires ~5.2 GB weights + ~5.2 GB gradients + ~20.8 GB optimizer states (&gt;32 GB VRAM).</a:t>
+              <a:t>Updating all 2.61B weights + AdamW states overflows consumer GPUs.</a:t>
             </a:r>
           </a:p>
           <a:p>
             <a:pPr>
               <a:spcAft>
-                <a:spcPts val="400"/>
+                <a:spcPts val="800"/>
               </a:spcAft>
               <a:defRPr>
                 <a:latin typeface="Calibri"/>
               </a:defRPr>
             </a:pPr>
             <a:r>
-              <a:rPr b="1" sz="1300">
+              <a:rPr b="1" sz="1500">
                 <a:solidFill>
                   <a:srgbClr val="0F172A"/>
                 </a:solidFill>
@@ -4059,41 +4056,41 @@
               <a:t>• Catastrophic Forgetting: </a:t>
             </a:r>
             <a:r>
-              <a:rPr b="0" sz="1300">
+              <a:rPr b="0" sz="1500">
                 <a:solidFill>
                   <a:srgbClr val="334155"/>
                 </a:solidFill>
                 <a:latin typeface="Calibri"/>
               </a:rPr>
-              <a:t>Overwriting all base weights on a narrow classification schema degrades general language understanding.</a:t>
+              <a:t>Overwriting all weights risks degrading general German fluency.</a:t>
             </a:r>
           </a:p>
           <a:p>
             <a:pPr>
               <a:spcAft>
-                <a:spcPts val="400"/>
+                <a:spcPts val="800"/>
               </a:spcAft>
               <a:defRPr>
                 <a:latin typeface="Calibri"/>
               </a:defRPr>
             </a:pPr>
             <a:r>
-              <a:rPr b="1" sz="1300">
+              <a:rPr b="1" sz="1500">
                 <a:solidFill>
                   <a:srgbClr val="0F172A"/>
                 </a:solidFill>
                 <a:latin typeface="Calibri"/>
               </a:rPr>
-              <a:t>• Storage Cost: </a:t>
-            </a:r>
-            <a:r>
-              <a:rPr b="0" sz="1300">
+              <a:t>• 5 GB Checkpoints: </a:t>
+            </a:r>
+            <a:r>
+              <a:rPr b="0" sz="1500">
                 <a:solidFill>
                   <a:srgbClr val="334155"/>
                 </a:solidFill>
                 <a:latin typeface="Calibri"/>
               </a:rPr>
-              <a:t>Saving 10 experiment checkpoints costs ~52 GB of disk space instead of ~80 MB per adapter.</a:t>
+              <a:t>Every saved experiment copies the entire 2.61B model.</a:t>
             </a:r>
           </a:p>
         </p:txBody>
@@ -4106,12 +4103,12 @@
         </p:nvSpPr>
         <p:spPr>
           <a:xfrm>
-            <a:off x="548640" y="3886200"/>
-            <a:ext cx="11064240" cy="2514600"/>
+            <a:off x="8046720" y="1463040"/>
+            <a:ext cx="3474720" cy="4754880"/>
           </a:xfrm>
           <a:prstGeom prst="roundRect">
             <a:avLst>
-              <a:gd name="adj" fmla="val 2000"/>
+              <a:gd name="adj" fmla="val 2500"/>
             </a:avLst>
           </a:prstGeom>
           <a:solidFill>
@@ -4153,8 +4150,8 @@
         </p:nvSpPr>
         <p:spPr>
           <a:xfrm>
-            <a:off x="548640" y="3959352"/>
-            <a:ext cx="73152" cy="2368296"/>
+            <a:off x="8046720" y="1554480"/>
+            <a:ext cx="82296" cy="4572000"/>
           </a:xfrm>
           <a:prstGeom prst="rect">
             <a:avLst/>
@@ -4196,8 +4193,8 @@
         </p:nvSpPr>
         <p:spPr>
           <a:xfrm>
-            <a:off x="749808" y="4014215"/>
-            <a:ext cx="10744200" cy="2295144"/>
+            <a:off x="8302752" y="1645920"/>
+            <a:ext cx="3063239" cy="4434840"/>
           </a:xfrm>
           <a:prstGeom prst="rect">
             <a:avLst/>
@@ -4212,9 +4209,9 @@
           <a:p>
             <a:pPr>
               <a:spcAft>
-                <a:spcPts val="600"/>
+                <a:spcPts val="1000"/>
               </a:spcAft>
-              <a:defRPr sz="1600" b="1">
+              <a:defRPr sz="1900" b="1">
                 <a:solidFill>
                   <a:srgbClr val="0D9488"/>
                 </a:solidFill>
@@ -4222,119 +4219,91 @@
               </a:defRPr>
             </a:pPr>
             <a:r>
-              <a:t>The Solution: Supervised Fine-Tuning (SFT) with LoRA &amp; QLoRA</a:t>
+              <a:t>LoRA &amp; QLoRA (Ours)</a:t>
             </a:r>
           </a:p>
           <a:p>
             <a:pPr>
               <a:spcAft>
-                <a:spcPts val="400"/>
+                <a:spcPts val="800"/>
               </a:spcAft>
               <a:defRPr>
                 <a:latin typeface="Calibri"/>
               </a:defRPr>
             </a:pPr>
             <a:r>
-              <a:rPr b="1" sz="1300">
+              <a:rPr b="1" sz="1500">
                 <a:solidFill>
                   <a:srgbClr val="0F172A"/>
                 </a:solidFill>
                 <a:latin typeface="Calibri"/>
               </a:rPr>
-              <a:t>• Task-Specific Calibration: </a:t>
-            </a:r>
-            <a:r>
-              <a:rPr b="0" sz="1300">
+              <a:t>• +26.7 F1 over 10-Shot: </a:t>
+            </a:r>
+            <a:r>
+              <a:rPr b="0" sz="1500">
                 <a:solidFill>
                   <a:srgbClr val="334155"/>
                 </a:solidFill>
                 <a:latin typeface="Calibri"/>
               </a:rPr>
-              <a:t>Teaches exact German annotation boundaries and guaranteed JSON compliance (100.0% valid JSON on test_syn).</a:t>
+              <a:t>Jumps from 0.258 (0-shot) &amp; 0.453 (10-shot) to 0.720 Micro-F1.</a:t>
             </a:r>
           </a:p>
           <a:p>
             <a:pPr>
               <a:spcAft>
-                <a:spcPts val="400"/>
+                <a:spcPts val="800"/>
               </a:spcAft>
               <a:defRPr>
                 <a:latin typeface="Calibri"/>
               </a:defRPr>
             </a:pPr>
             <a:r>
-              <a:rPr b="1" sz="1300">
+              <a:rPr b="1" sz="1500">
                 <a:solidFill>
                   <a:srgbClr val="0F172A"/>
                 </a:solidFill>
                 <a:latin typeface="Calibri"/>
               </a:rPr>
-              <a:t>• Massive Accuracy Jump: </a:t>
-            </a:r>
-            <a:r>
-              <a:rPr b="0" sz="1300">
+              <a:t>• 100% Valid JSON: </a:t>
+            </a:r>
+            <a:r>
+              <a:rPr b="0" sz="1500">
                 <a:solidFill>
                   <a:srgbClr val="334155"/>
                 </a:solidFill>
                 <a:latin typeface="Calibri"/>
               </a:rPr>
-              <a:t>Boosts Task C2 Micro-F1 from 0.258 (Zero-Shot) and 0.453 (10-Shot) up to 0.720 (LoRA / QLoRA) — a +26.7 F1 gain over 10-shot.</a:t>
+              <a:t>Learns the exact output schema without post-processing hacks.</a:t>
             </a:r>
           </a:p>
           <a:p>
             <a:pPr>
               <a:spcAft>
-                <a:spcPts val="400"/>
+                <a:spcPts val="800"/>
               </a:spcAft>
               <a:defRPr>
                 <a:latin typeface="Calibri"/>
               </a:defRPr>
             </a:pPr>
             <a:r>
-              <a:rPr b="1" sz="1300">
+              <a:rPr b="1" sz="1500">
                 <a:solidFill>
                   <a:srgbClr val="0F172A"/>
                 </a:solidFill>
                 <a:latin typeface="Calibri"/>
               </a:rPr>
-              <a:t>• Zero Inference Overhead: </a:t>
-            </a:r>
-            <a:r>
-              <a:rPr b="0" sz="1300">
+              <a:t>• Tiny Memory &amp; Disk: </a:t>
+            </a:r>
+            <a:r>
+              <a:rPr b="0" sz="1500">
                 <a:solidFill>
                   <a:srgbClr val="334155"/>
                 </a:solidFill>
                 <a:latin typeface="Calibri"/>
               </a:rPr>
-              <a:t>Trained low-rank matrices (B·A) can be merged directly into W_0 or run with compact Zero-Shot prompts (2.1x faster than 10-shot).</a:t>
-            </a:r>
-          </a:p>
-          <a:p>
-            <a:pPr>
-              <a:spcAft>
-                <a:spcPts val="400"/>
-              </a:spcAft>
-              <a:defRPr>
-                <a:latin typeface="Calibri"/>
-              </a:defRPr>
-            </a:pPr>
-            <a:r>
-              <a:rPr b="1" sz="1300">
-                <a:solidFill>
-                  <a:srgbClr val="0F172A"/>
-                </a:solidFill>
-                <a:latin typeface="Calibri"/>
-              </a:rPr>
-              <a:t>• Single-GPU Accessibility: </a:t>
-            </a:r>
-            <a:r>
-              <a:rPr b="0" sz="1300">
-                <a:solidFill>
-                  <a:srgbClr val="334155"/>
-                </a:solidFill>
-                <a:latin typeface="Calibri"/>
-              </a:rPr>
-              <a:t>Trains in ~2.9 GB peak VRAM with 4-bit NF4 QLoRA or ~7.2 GB with 16-bit bfloat16 LoRA on a single Google Colab GPU.</a:t>
+              <a:t>Trains in 2.9 GB VRAM (QLoRA); saves 41 MB adapter files.</a:t>
             </a:r>
           </a:p>
         </p:txBody>
@@ -4408,8 +4377,8 @@
         </p:nvSpPr>
         <p:spPr>
           <a:xfrm>
-            <a:off x="548640" y="228600"/>
-            <a:ext cx="10241280" cy="777240"/>
+            <a:off x="640080" y="256032"/>
+            <a:ext cx="10058400" cy="868680"/>
           </a:xfrm>
           <a:prstGeom prst="rect">
             <a:avLst/>
@@ -4423,7 +4392,7 @@
           <a:lstStyle/>
           <a:p>
             <a:pPr>
-              <a:defRPr sz="2600" b="1">
+              <a:defRPr sz="2800" b="1">
                 <a:solidFill>
                   <a:srgbClr val="0F172A"/>
                 </a:solidFill>
@@ -4431,12 +4400,12 @@
               </a:defRPr>
             </a:pPr>
             <a:r>
-              <a:t>2. Core Concept I — Data: GermEval 2017 ABSA as Structured JSON Generation</a:t>
-            </a:r>
-          </a:p>
-          <a:p>
-            <a:pPr>
-              <a:defRPr sz="1350">
+              <a:t>2. Core Concept I — Data: GermEval 2017 to Structured JSON</a:t>
+            </a:r>
+          </a:p>
+          <a:p>
+            <a:pPr>
+              <a:defRPr sz="1500">
                 <a:solidFill>
                   <a:srgbClr val="64748B"/>
                 </a:solidFill>
@@ -4444,7 +4413,7 @@
               </a:defRPr>
             </a:pPr>
             <a:r>
-              <a:t>Converting 26,209 German Deutsche Bahn customer feedback documents into a deterministic instruction-tuning contract</a:t>
+              <a:t>26,209 Deutsche Bahn customer reviews converted into deterministic JSON targets</a:t>
             </a:r>
           </a:p>
         </p:txBody>
@@ -4457,8 +4426,8 @@
         </p:nvSpPr>
         <p:spPr>
           <a:xfrm>
-            <a:off x="10789920" y="274320"/>
-            <a:ext cx="914400" cy="365760"/>
+            <a:off x="10698480" y="292608"/>
+            <a:ext cx="868680" cy="365760"/>
           </a:xfrm>
           <a:prstGeom prst="rect">
             <a:avLst/>
@@ -4472,7 +4441,7 @@
           <a:lstStyle/>
           <a:p>
             <a:pPr algn="r">
-              <a:defRPr sz="1200" b="1">
+              <a:defRPr sz="1300" b="1">
                 <a:solidFill>
                   <a:srgbClr val="64748B"/>
                 </a:solidFill>
@@ -4493,8 +4462,8 @@
         </p:nvSpPr>
         <p:spPr>
           <a:xfrm>
-            <a:off x="548640" y="1078992"/>
-            <a:ext cx="11094415" cy="18288"/>
+            <a:off x="640080" y="1170432"/>
+            <a:ext cx="10911535" cy="18288"/>
           </a:xfrm>
           <a:prstGeom prst="rect">
             <a:avLst/>
@@ -4536,12 +4505,12 @@
         </p:nvSpPr>
         <p:spPr>
           <a:xfrm>
-            <a:off x="548640" y="1280160"/>
-            <a:ext cx="5303520" cy="5120640"/>
+            <a:off x="640080" y="1463040"/>
+            <a:ext cx="5120640" cy="4754880"/>
           </a:xfrm>
           <a:prstGeom prst="roundRect">
             <a:avLst>
-              <a:gd name="adj" fmla="val 2000"/>
+              <a:gd name="adj" fmla="val 2500"/>
             </a:avLst>
           </a:prstGeom>
           <a:solidFill>
@@ -4583,8 +4552,8 @@
         </p:nvSpPr>
         <p:spPr>
           <a:xfrm>
-            <a:off x="548640" y="1353312"/>
-            <a:ext cx="73152" cy="4974336"/>
+            <a:off x="640080" y="1554480"/>
+            <a:ext cx="82296" cy="4572000"/>
           </a:xfrm>
           <a:prstGeom prst="rect">
             <a:avLst/>
@@ -4626,8 +4595,8 @@
         </p:nvSpPr>
         <p:spPr>
           <a:xfrm>
-            <a:off x="749808" y="1408176"/>
-            <a:ext cx="4983480" cy="4901183"/>
+            <a:off x="896112" y="1645920"/>
+            <a:ext cx="4709159" cy="4434840"/>
           </a:xfrm>
           <a:prstGeom prst="rect">
             <a:avLst/>
@@ -4642,9 +4611,9 @@
           <a:p>
             <a:pPr>
               <a:spcAft>
-                <a:spcPts val="600"/>
+                <a:spcPts val="1000"/>
               </a:spcAft>
-              <a:defRPr sz="1600" b="1">
+              <a:defRPr sz="1900" b="1">
                 <a:solidFill>
                   <a:srgbClr val="2563EB"/>
                 </a:solidFill>
@@ -4652,175 +4621,119 @@
               </a:defRPr>
             </a:pPr>
             <a:r>
-              <a:t>Dataset &amp; Task Formulation</a:t>
+              <a:t>Task C: Aspect–Polarity Classification</a:t>
             </a:r>
           </a:p>
           <a:p>
             <a:pPr>
               <a:spcAft>
-                <a:spcPts val="400"/>
+                <a:spcPts val="800"/>
               </a:spcAft>
               <a:defRPr>
                 <a:latin typeface="Calibri"/>
               </a:defRPr>
             </a:pPr>
             <a:r>
-              <a:rPr b="1" sz="1300">
+              <a:rPr b="1" sz="1500">
                 <a:solidFill>
                   <a:srgbClr val="0F172A"/>
                 </a:solidFill>
                 <a:latin typeface="Calibri"/>
               </a:rPr>
-              <a:t>• Corpus Splits (26,209 Docs): </a:t>
-            </a:r>
-            <a:r>
-              <a:rPr b="0" sz="1300">
+              <a:t>• Dataset Splits: </a:t>
+            </a:r>
+            <a:r>
+              <a:rPr b="0" sz="1500">
                 <a:solidFill>
                   <a:srgbClr val="334155"/>
                 </a:solidFill>
                 <a:latin typeface="Calibri"/>
               </a:rPr>
-              <a:t>Train: 19,432 | Dev: 2,369 | Test Synchronic: 2,566 | Test Diachronic: 1,842 social media &amp; web comments.</a:t>
+              <a:t>19,432 Train | 2,369 Dev | 2,566 Test (Syn) | 1,842 Test (Dia).</a:t>
             </a:r>
           </a:p>
           <a:p>
             <a:pPr>
               <a:spcAft>
-                <a:spcPts val="400"/>
+                <a:spcPts val="800"/>
               </a:spcAft>
               <a:defRPr>
                 <a:latin typeface="Calibri"/>
               </a:defRPr>
             </a:pPr>
             <a:r>
-              <a:rPr b="1" sz="1300">
+              <a:rPr b="1" sz="1500">
                 <a:solidFill>
                   <a:srgbClr val="0F172A"/>
                 </a:solidFill>
                 <a:latin typeface="Calibri"/>
               </a:rPr>
-              <a:t>• Task C (Aspect–Polarity Classification): </a:t>
-            </a:r>
-            <a:r>
-              <a:rPr b="0" sz="1300">
+              <a:t>• Label Space: </a:t>
+            </a:r>
+            <a:r>
+              <a:rPr b="0" sz="1500">
                 <a:solidFill>
                   <a:srgbClr val="334155"/>
                 </a:solidFill>
                 <a:latin typeface="Calibri"/>
               </a:rPr>
-              <a:t>Predict all unique (Category:polarity) pairs expressed in the document across 19 aspect categories × 3 polarities (positive, negative, neutral).</a:t>
+              <a:t>19 aspect categories × 3 polarities (positive, negative, neutral).</a:t>
             </a:r>
           </a:p>
           <a:p>
             <a:pPr>
               <a:spcAft>
-                <a:spcPts val="400"/>
+                <a:spcPts val="800"/>
               </a:spcAft>
               <a:defRPr>
                 <a:latin typeface="Calibri"/>
               </a:defRPr>
             </a:pPr>
             <a:r>
-              <a:rPr b="1" sz="1300">
+              <a:rPr b="1" sz="1500">
                 <a:solidFill>
                   <a:srgbClr val="0F172A"/>
                 </a:solidFill>
                 <a:latin typeface="Calibri"/>
               </a:rPr>
-              <a:t>• Implicit Relevance Handling: </a:t>
-            </a:r>
-            <a:r>
-              <a:rPr b="0" sz="1300">
+              <a:t>• Out-of-Domain Posts: </a:t>
+            </a:r>
+            <a:r>
+              <a:rPr b="0" sz="1500">
                 <a:solidFill>
                   <a:srgbClr val="334155"/>
                 </a:solidFill>
                 <a:latin typeface="Calibri"/>
               </a:rPr>
-              <a:t>Out-of-domain documents (relevance=false, ~21% of corpus) map cleanly to an empty JSON list: {"labels": []}.</a:t>
+              <a:t>relevance=false (21% of docs) maps cleanly to {"labels": []}.</a:t>
             </a:r>
           </a:p>
           <a:p>
             <a:pPr>
               <a:spcAft>
-                <a:spcPts val="400"/>
+                <a:spcPts val="800"/>
               </a:spcAft>
               <a:defRPr>
                 <a:latin typeface="Calibri"/>
               </a:defRPr>
             </a:pPr>
             <a:r>
-              <a:rPr b="1" sz="1300">
+              <a:rPr b="1" sz="1500">
                 <a:solidFill>
                   <a:srgbClr val="0F172A"/>
                 </a:solidFill>
                 <a:latin typeface="Calibri"/>
               </a:rPr>
-              <a:t>• Task D (Opinion Target Extraction): </a:t>
-            </a:r>
-            <a:r>
-              <a:rPr b="0" sz="1300">
+              <a:t>• Deterministic Order: </a:t>
+            </a:r>
+            <a:r>
+              <a:rPr b="0" sz="1500">
                 <a:solidFill>
                   <a:srgbClr val="334155"/>
                 </a:solidFill>
                 <a:latin typeface="Calibri"/>
               </a:rPr>
-              <a:t>Extract exact character-grounded target phrases (OTE) for non-Allgemein opinions alongside category and polarity.</a:t>
-            </a:r>
-          </a:p>
-          <a:p>
-            <a:pPr>
-              <a:spcAft>
-                <a:spcPts val="400"/>
-              </a:spcAft>
-              <a:defRPr>
-                <a:latin typeface="Calibri"/>
-              </a:defRPr>
-            </a:pPr>
-            <a:r>
-              <a:rPr b="1" sz="1300">
-                <a:solidFill>
-                  <a:srgbClr val="0F172A"/>
-                </a:solidFill>
-                <a:latin typeface="Calibri"/>
-              </a:rPr>
-              <a:t>• Canonical Deduplication &amp; Sorting: </a:t>
-            </a:r>
-            <a:r>
-              <a:rPr b="0" sz="1300">
-                <a:solidFill>
-                  <a:srgbClr val="334155"/>
-                </a:solidFill>
-                <a:latin typeface="Calibri"/>
-              </a:rPr>
-              <a:t>Target JSON lists are sorted alphabetically so every document has a unique, deterministic gold target string.</a:t>
-            </a:r>
-          </a:p>
-          <a:p>
-            <a:pPr>
-              <a:spcAft>
-                <a:spcPts val="400"/>
-              </a:spcAft>
-              <a:defRPr>
-                <a:latin typeface="Calibri"/>
-              </a:defRPr>
-            </a:pPr>
-            <a:r>
-              <a:rPr b="1" sz="1300">
-                <a:solidFill>
-                  <a:srgbClr val="0F172A"/>
-                </a:solidFill>
-                <a:latin typeface="Calibri"/>
-              </a:rPr>
-              <a:t>• Zero-Preprocessing Colab Bootstrap: </a:t>
-            </a:r>
-            <a:r>
-              <a:rPr b="0" sz="1300">
-                <a:solidFill>
-                  <a:srgbClr val="334155"/>
-                </a:solidFill>
-                <a:latin typeface="Calibri"/>
-              </a:rPr>
-              <a:t>All 26,209 canonical records ship as 5 MB of .jsonl.gz archives and materialize derived SFT splits in 1.5 seconds.</a:t>
+              <a:t>Labels are deduplicated and sorted alphabetically for stable training.</a:t>
             </a:r>
           </a:p>
         </p:txBody>
@@ -4833,12 +4746,12 @@
         </p:nvSpPr>
         <p:spPr>
           <a:xfrm>
-            <a:off x="6080760" y="1280160"/>
-            <a:ext cx="5532120" cy="2423160"/>
+            <a:off x="6035040" y="1463040"/>
+            <a:ext cx="5486400" cy="2240280"/>
           </a:xfrm>
           <a:prstGeom prst="roundRect">
             <a:avLst>
-              <a:gd name="adj" fmla="val 2000"/>
+              <a:gd name="adj" fmla="val 2500"/>
             </a:avLst>
           </a:prstGeom>
           <a:solidFill>
@@ -4880,8 +4793,8 @@
         </p:nvSpPr>
         <p:spPr>
           <a:xfrm>
-            <a:off x="6245352" y="1389888"/>
-            <a:ext cx="5202936" cy="2203704"/>
+            <a:off x="6254496" y="1627632"/>
+            <a:ext cx="5047488" cy="1947672"/>
           </a:xfrm>
           <a:prstGeom prst="rect">
             <a:avLst/>
@@ -4896,9 +4809,9 @@
           <a:p>
             <a:pPr>
               <a:spcAft>
-                <a:spcPts val="400"/>
+                <a:spcPts val="800"/>
               </a:spcAft>
-              <a:defRPr sz="1250" b="1">
+              <a:defRPr sz="1400" b="1">
                 <a:solidFill>
                   <a:srgbClr val="60A5FA"/>
                 </a:solidFill>
@@ -4906,15 +4819,15 @@
               </a:defRPr>
             </a:pPr>
             <a:r>
-              <a:t>Raw GermEval 2017 XML Input Document</a:t>
+              <a:t>Input: Raw Customer Review (XML)</a:t>
             </a:r>
           </a:p>
           <a:p>
             <a:pPr>
               <a:spcAft>
-                <a:spcPts val="100"/>
+                <a:spcPts val="200"/>
               </a:spcAft>
-              <a:defRPr sz="1050">
+              <a:defRPr sz="1200">
                 <a:solidFill>
                   <a:srgbClr val="E2E8F0"/>
                 </a:solidFill>
@@ -4922,15 +4835,15 @@
               </a:defRPr>
             </a:pPr>
             <a:r>
-              <a:t>&lt;Document id="http://twitter.com/.../697803"&gt;</a:t>
+              <a:t>"@DB_Bahn Mal wieder 45 Minuten Verspätung</a:t>
             </a:r>
           </a:p>
           <a:p>
             <a:pPr>
               <a:spcAft>
-                <a:spcPts val="100"/>
+                <a:spcPts val="200"/>
               </a:spcAft>
-              <a:defRPr sz="1050">
+              <a:defRPr sz="1200">
                 <a:solidFill>
                   <a:srgbClr val="E2E8F0"/>
                 </a:solidFill>
@@ -4938,15 +4851,15 @@
               </a:defRPr>
             </a:pPr>
             <a:r>
-              <a:t>  &lt;relevance&gt;true&lt;/relevance&gt;</a:t>
+              <a:t> im ICE nach München und das WLAN geht</a:t>
             </a:r>
           </a:p>
           <a:p>
             <a:pPr>
               <a:spcAft>
-                <a:spcPts val="100"/>
+                <a:spcPts val="200"/>
               </a:spcAft>
-              <a:defRPr sz="1050">
+              <a:defRPr sz="1200">
                 <a:solidFill>
                   <a:srgbClr val="E2E8F0"/>
                 </a:solidFill>
@@ -4954,31 +4867,28 @@
               </a:defRPr>
             </a:pPr>
             <a:r>
-              <a:t>  &lt;sentiment&gt;negative&lt;/sentiment&gt;</a:t>
+              <a:t> auch nicht!"</a:t>
             </a:r>
           </a:p>
           <a:p>
             <a:pPr>
               <a:spcAft>
-                <a:spcPts val="100"/>
+                <a:spcPts val="200"/>
               </a:spcAft>
-              <a:defRPr sz="1050">
+              <a:defRPr sz="1200">
                 <a:solidFill>
                   <a:srgbClr val="E2E8F0"/>
                 </a:solidFill>
                 <a:latin typeface="Courier New"/>
               </a:defRPr>
             </a:pPr>
-            <a:r>
-              <a:t>  &lt;text&gt;@DB_Bahn Mal wieder 45 Minuten Verspätung</a:t>
-            </a:r>
           </a:p>
           <a:p>
             <a:pPr>
               <a:spcAft>
-                <a:spcPts val="100"/>
+                <a:spcPts val="200"/>
               </a:spcAft>
-              <a:defRPr sz="1050">
+              <a:defRPr sz="1200">
                 <a:solidFill>
                   <a:srgbClr val="E2E8F0"/>
                 </a:solidFill>
@@ -4986,15 +4896,15 @@
               </a:defRPr>
             </a:pPr>
             <a:r>
-              <a:t>        im ICE nach München und das WLAN geht</a:t>
+              <a:t>Gold Annotations:</a:t>
             </a:r>
           </a:p>
           <a:p>
             <a:pPr>
               <a:spcAft>
-                <a:spcPts val="100"/>
+                <a:spcPts val="200"/>
               </a:spcAft>
-              <a:defRPr sz="1050">
+              <a:defRPr sz="1200">
                 <a:solidFill>
                   <a:srgbClr val="E2E8F0"/>
                 </a:solidFill>
@@ -5002,15 +4912,15 @@
               </a:defRPr>
             </a:pPr>
             <a:r>
-              <a:t>        auch nicht!&lt;/text&gt;</a:t>
+              <a:t> • Zugfahrt#Pünktlichkeit -&gt; negative</a:t>
             </a:r>
           </a:p>
           <a:p>
             <a:pPr>
               <a:spcAft>
-                <a:spcPts val="100"/>
+                <a:spcPts val="200"/>
               </a:spcAft>
-              <a:defRPr sz="1050">
+              <a:defRPr sz="1200">
                 <a:solidFill>
                   <a:srgbClr val="E2E8F0"/>
                 </a:solidFill>
@@ -5018,103 +4928,7 @@
               </a:defRPr>
             </a:pPr>
             <a:r>
-              <a:t>  &lt;Opinions&gt;</a:t>
-            </a:r>
-          </a:p>
-          <a:p>
-            <a:pPr>
-              <a:spcAft>
-                <a:spcPts val="100"/>
-              </a:spcAft>
-              <a:defRPr sz="1050">
-                <a:solidFill>
-                  <a:srgbClr val="E2E8F0"/>
-                </a:solidFill>
-                <a:latin typeface="Courier New"/>
-              </a:defRPr>
-            </a:pPr>
-            <a:r>
-              <a:t>    &lt;Opinion category="Zugfahrt#Pünktlichkeit"</a:t>
-            </a:r>
-          </a:p>
-          <a:p>
-            <a:pPr>
-              <a:spcAft>
-                <a:spcPts val="100"/>
-              </a:spcAft>
-              <a:defRPr sz="1050">
-                <a:solidFill>
-                  <a:srgbClr val="E2E8F0"/>
-                </a:solidFill>
-                <a:latin typeface="Courier New"/>
-              </a:defRPr>
-            </a:pPr>
-            <a:r>
-              <a:t>             polarity="negative" target="Verspätung"/&gt;</a:t>
-            </a:r>
-          </a:p>
-          <a:p>
-            <a:pPr>
-              <a:spcAft>
-                <a:spcPts val="100"/>
-              </a:spcAft>
-              <a:defRPr sz="1050">
-                <a:solidFill>
-                  <a:srgbClr val="E2E8F0"/>
-                </a:solidFill>
-                <a:latin typeface="Courier New"/>
-              </a:defRPr>
-            </a:pPr>
-            <a:r>
-              <a:t>    &lt;Opinion category="Sonstige_Unregelmässigkeiten"</a:t>
-            </a:r>
-          </a:p>
-          <a:p>
-            <a:pPr>
-              <a:spcAft>
-                <a:spcPts val="100"/>
-              </a:spcAft>
-              <a:defRPr sz="1050">
-                <a:solidFill>
-                  <a:srgbClr val="E2E8F0"/>
-                </a:solidFill>
-                <a:latin typeface="Courier New"/>
-              </a:defRPr>
-            </a:pPr>
-            <a:r>
-              <a:t>             polarity="negative" target="WLAN"/&gt;</a:t>
-            </a:r>
-          </a:p>
-          <a:p>
-            <a:pPr>
-              <a:spcAft>
-                <a:spcPts val="100"/>
-              </a:spcAft>
-              <a:defRPr sz="1050">
-                <a:solidFill>
-                  <a:srgbClr val="E2E8F0"/>
-                </a:solidFill>
-                <a:latin typeface="Courier New"/>
-              </a:defRPr>
-            </a:pPr>
-            <a:r>
-              <a:t>  &lt;/Opinions&gt;</a:t>
-            </a:r>
-          </a:p>
-          <a:p>
-            <a:pPr>
-              <a:spcAft>
-                <a:spcPts val="100"/>
-              </a:spcAft>
-              <a:defRPr sz="1050">
-                <a:solidFill>
-                  <a:srgbClr val="E2E8F0"/>
-                </a:solidFill>
-                <a:latin typeface="Courier New"/>
-              </a:defRPr>
-            </a:pPr>
-            <a:r>
-              <a:t>&lt;/Document&gt;</a:t>
+              <a:t> • Sonstige_Unregelmässigkeiten -&gt; negative</a:t>
             </a:r>
           </a:p>
         </p:txBody>
@@ -5127,12 +4941,12 @@
         </p:nvSpPr>
         <p:spPr>
           <a:xfrm>
-            <a:off x="6080760" y="3886200"/>
-            <a:ext cx="5532120" cy="2514600"/>
+            <a:off x="6035040" y="3977639"/>
+            <a:ext cx="5486400" cy="2240280"/>
           </a:xfrm>
           <a:prstGeom prst="roundRect">
             <a:avLst>
-              <a:gd name="adj" fmla="val 2000"/>
+              <a:gd name="adj" fmla="val 2500"/>
             </a:avLst>
           </a:prstGeom>
           <a:solidFill>
@@ -5174,8 +4988,8 @@
         </p:nvSpPr>
         <p:spPr>
           <a:xfrm>
-            <a:off x="6245352" y="3995928"/>
-            <a:ext cx="5202936" cy="2295144"/>
+            <a:off x="6254496" y="4142231"/>
+            <a:ext cx="5047488" cy="1947672"/>
           </a:xfrm>
           <a:prstGeom prst="rect">
             <a:avLst/>
@@ -5190,9 +5004,9 @@
           <a:p>
             <a:pPr>
               <a:spcAft>
-                <a:spcPts val="400"/>
+                <a:spcPts val="800"/>
               </a:spcAft>
-              <a:defRPr sz="1250" b="1">
+              <a:defRPr sz="1400" b="1">
                 <a:solidFill>
                   <a:srgbClr val="60A5FA"/>
                 </a:solidFill>
@@ -5200,15 +5014,15 @@
               </a:defRPr>
             </a:pPr>
             <a:r>
-              <a:t>Derived Task C &amp; Task D JSON Completion Targets</a:t>
+              <a:t>Output: Deterministic SFT Target (JSON)</a:t>
             </a:r>
           </a:p>
           <a:p>
             <a:pPr>
               <a:spcAft>
-                <a:spcPts val="100"/>
+                <a:spcPts val="200"/>
               </a:spcAft>
-              <a:defRPr sz="1000">
+              <a:defRPr sz="1300">
                 <a:solidFill>
                   <a:srgbClr val="E2E8F0"/>
                 </a:solidFill>
@@ -5216,15 +5030,15 @@
               </a:defRPr>
             </a:pPr>
             <a:r>
-              <a:t># Task C Target Completion (Sorted Set of Category:polarity):</a:t>
+              <a:t>{</a:t>
             </a:r>
           </a:p>
           <a:p>
             <a:pPr>
               <a:spcAft>
-                <a:spcPts val="100"/>
+                <a:spcPts val="200"/>
               </a:spcAft>
-              <a:defRPr sz="1000">
+              <a:defRPr sz="1300">
                 <a:solidFill>
                   <a:srgbClr val="E2E8F0"/>
                 </a:solidFill>
@@ -5232,15 +5046,15 @@
               </a:defRPr>
             </a:pPr>
             <a:r>
-              <a:t>{</a:t>
+              <a:t>  "labels": [</a:t>
             </a:r>
           </a:p>
           <a:p>
             <a:pPr>
               <a:spcAft>
-                <a:spcPts val="100"/>
+                <a:spcPts val="200"/>
               </a:spcAft>
-              <a:defRPr sz="1000">
+              <a:defRPr sz="1300">
                 <a:solidFill>
                   <a:srgbClr val="E2E8F0"/>
                 </a:solidFill>
@@ -5248,15 +5062,15 @@
               </a:defRPr>
             </a:pPr>
             <a:r>
-              <a:t>  "labels": [</a:t>
+              <a:t>    "Sonstige_Unregelmässigkeiten:negative",</a:t>
             </a:r>
           </a:p>
           <a:p>
             <a:pPr>
               <a:spcAft>
-                <a:spcPts val="100"/>
+                <a:spcPts val="200"/>
               </a:spcAft>
-              <a:defRPr sz="1000">
+              <a:defRPr sz="1300">
                 <a:solidFill>
                   <a:srgbClr val="E2E8F0"/>
                 </a:solidFill>
@@ -5264,15 +5078,15 @@
               </a:defRPr>
             </a:pPr>
             <a:r>
-              <a:t>    "Sonstige_Unregelmässigkeiten:negative",</a:t>
+              <a:t>    "Zugfahrt:negative"</a:t>
             </a:r>
           </a:p>
           <a:p>
             <a:pPr>
               <a:spcAft>
-                <a:spcPts val="100"/>
+                <a:spcPts val="200"/>
               </a:spcAft>
-              <a:defRPr sz="1000">
+              <a:defRPr sz="1300">
                 <a:solidFill>
                   <a:srgbClr val="E2E8F0"/>
                 </a:solidFill>
@@ -5280,188 +5094,15 @@
               </a:defRPr>
             </a:pPr>
             <a:r>
-              <a:t>    "Zugfahrt:negative"</a:t>
+              <a:t>  ]</a:t>
             </a:r>
           </a:p>
           <a:p>
             <a:pPr>
               <a:spcAft>
-                <a:spcPts val="100"/>
+                <a:spcPts val="200"/>
               </a:spcAft>
-              <a:defRPr sz="1000">
-                <a:solidFill>
-                  <a:srgbClr val="E2E8F0"/>
-                </a:solidFill>
-                <a:latin typeface="Courier New"/>
-              </a:defRPr>
-            </a:pPr>
-            <a:r>
-              <a:t>  ]</a:t>
-            </a:r>
-          </a:p>
-          <a:p>
-            <a:pPr>
-              <a:spcAft>
-                <a:spcPts val="100"/>
-              </a:spcAft>
-              <a:defRPr sz="1000">
-                <a:solidFill>
-                  <a:srgbClr val="E2E8F0"/>
-                </a:solidFill>
-                <a:latin typeface="Courier New"/>
-              </a:defRPr>
-            </a:pPr>
-            <a:r>
-              <a:t>}</a:t>
-            </a:r>
-          </a:p>
-          <a:p>
-            <a:pPr>
-              <a:spcAft>
-                <a:spcPts val="100"/>
-              </a:spcAft>
-              <a:defRPr sz="1000">
-                <a:solidFill>
-                  <a:srgbClr val="E2E8F0"/>
-                </a:solidFill>
-                <a:latin typeface="Courier New"/>
-              </a:defRPr>
-            </a:pPr>
-          </a:p>
-          <a:p>
-            <a:pPr>
-              <a:spcAft>
-                <a:spcPts val="100"/>
-              </a:spcAft>
-              <a:defRPr sz="1000">
-                <a:solidFill>
-                  <a:srgbClr val="E2E8F0"/>
-                </a:solidFill>
-                <a:latin typeface="Courier New"/>
-              </a:defRPr>
-            </a:pPr>
-            <a:r>
-              <a:t># Task D Target Completion (Explicit Target Spans):</a:t>
-            </a:r>
-          </a:p>
-          <a:p>
-            <a:pPr>
-              <a:spcAft>
-                <a:spcPts val="100"/>
-              </a:spcAft>
-              <a:defRPr sz="1000">
-                <a:solidFill>
-                  <a:srgbClr val="E2E8F0"/>
-                </a:solidFill>
-                <a:latin typeface="Courier New"/>
-              </a:defRPr>
-            </a:pPr>
-            <a:r>
-              <a:t>{</a:t>
-            </a:r>
-          </a:p>
-          <a:p>
-            <a:pPr>
-              <a:spcAft>
-                <a:spcPts val="100"/>
-              </a:spcAft>
-              <a:defRPr sz="1000">
-                <a:solidFill>
-                  <a:srgbClr val="E2E8F0"/>
-                </a:solidFill>
-                <a:latin typeface="Courier New"/>
-              </a:defRPr>
-            </a:pPr>
-            <a:r>
-              <a:t>  "targets": [</a:t>
-            </a:r>
-          </a:p>
-          <a:p>
-            <a:pPr>
-              <a:spcAft>
-                <a:spcPts val="100"/>
-              </a:spcAft>
-              <a:defRPr sz="1000">
-                <a:solidFill>
-                  <a:srgbClr val="E2E8F0"/>
-                </a:solidFill>
-                <a:latin typeface="Courier New"/>
-              </a:defRPr>
-            </a:pPr>
-            <a:r>
-              <a:t>    {"category": "Zugfahrt", "polarity": "negative",</a:t>
-            </a:r>
-          </a:p>
-          <a:p>
-            <a:pPr>
-              <a:spcAft>
-                <a:spcPts val="100"/>
-              </a:spcAft>
-              <a:defRPr sz="1000">
-                <a:solidFill>
-                  <a:srgbClr val="E2E8F0"/>
-                </a:solidFill>
-                <a:latin typeface="Courier New"/>
-              </a:defRPr>
-            </a:pPr>
-            <a:r>
-              <a:t>     "target": "Verspätung"},</a:t>
-            </a:r>
-          </a:p>
-          <a:p>
-            <a:pPr>
-              <a:spcAft>
-                <a:spcPts val="100"/>
-              </a:spcAft>
-              <a:defRPr sz="1000">
-                <a:solidFill>
-                  <a:srgbClr val="E2E8F0"/>
-                </a:solidFill>
-                <a:latin typeface="Courier New"/>
-              </a:defRPr>
-            </a:pPr>
-            <a:r>
-              <a:t>    {"category": "Sonstige_Unregelmässigkeiten",</a:t>
-            </a:r>
-          </a:p>
-          <a:p>
-            <a:pPr>
-              <a:spcAft>
-                <a:spcPts val="100"/>
-              </a:spcAft>
-              <a:defRPr sz="1000">
-                <a:solidFill>
-                  <a:srgbClr val="E2E8F0"/>
-                </a:solidFill>
-                <a:latin typeface="Courier New"/>
-              </a:defRPr>
-            </a:pPr>
-            <a:r>
-              <a:t>     "polarity": "negative", "target": "WLAN"}</a:t>
-            </a:r>
-          </a:p>
-          <a:p>
-            <a:pPr>
-              <a:spcAft>
-                <a:spcPts val="100"/>
-              </a:spcAft>
-              <a:defRPr sz="1000">
-                <a:solidFill>
-                  <a:srgbClr val="E2E8F0"/>
-                </a:solidFill>
-                <a:latin typeface="Courier New"/>
-              </a:defRPr>
-            </a:pPr>
-            <a:r>
-              <a:t>  ]</a:t>
-            </a:r>
-          </a:p>
-          <a:p>
-            <a:pPr>
-              <a:spcAft>
-                <a:spcPts val="100"/>
-              </a:spcAft>
-              <a:defRPr sz="1000">
+              <a:defRPr sz="1300">
                 <a:solidFill>
                   <a:srgbClr val="E2E8F0"/>
                 </a:solidFill>
@@ -5543,8 +5184,8 @@
         </p:nvSpPr>
         <p:spPr>
           <a:xfrm>
-            <a:off x="548640" y="228600"/>
-            <a:ext cx="10241280" cy="777240"/>
+            <a:off x="640080" y="256032"/>
+            <a:ext cx="10058400" cy="868680"/>
           </a:xfrm>
           <a:prstGeom prst="rect">
             <a:avLst/>
@@ -5558,7 +5199,7 @@
           <a:lstStyle/>
           <a:p>
             <a:pPr>
-              <a:defRPr sz="2600" b="1">
+              <a:defRPr sz="2800" b="1">
                 <a:solidFill>
                   <a:srgbClr val="0F172A"/>
                 </a:solidFill>
@@ -5566,12 +5207,12 @@
               </a:defRPr>
             </a:pPr>
             <a:r>
-              <a:t>3. Core Concept I — Data: Chat Template &amp; Completion-Only Loss Masking</a:t>
-            </a:r>
-          </a:p>
-          <a:p>
-            <a:pPr>
-              <a:defRPr sz="1350">
+              <a:t>3. Core Concept I — Data: Completion-Only Loss Masking</a:t>
+            </a:r>
+          </a:p>
+          <a:p>
+            <a:pPr>
+              <a:defRPr sz="1500">
                 <a:solidFill>
                   <a:srgbClr val="64748B"/>
                 </a:solidFill>
@@ -5579,7 +5220,7 @@
               </a:defRPr>
             </a:pPr>
             <a:r>
-              <a:t>Why masking prompt tokens with -100 in SFTTrainer is essential when prompts are ~50x longer than JSON completions</a:t>
+              <a:t>Focusing 100% of gradient updates on the JSON answer via labels = -100</a:t>
             </a:r>
           </a:p>
         </p:txBody>
@@ -5592,8 +5233,8 @@
         </p:nvSpPr>
         <p:spPr>
           <a:xfrm>
-            <a:off x="10789920" y="274320"/>
-            <a:ext cx="914400" cy="365760"/>
+            <a:off x="10698480" y="292608"/>
+            <a:ext cx="868680" cy="365760"/>
           </a:xfrm>
           <a:prstGeom prst="rect">
             <a:avLst/>
@@ -5607,7 +5248,7 @@
           <a:lstStyle/>
           <a:p>
             <a:pPr algn="r">
-              <a:defRPr sz="1200" b="1">
+              <a:defRPr sz="1300" b="1">
                 <a:solidFill>
                   <a:srgbClr val="64748B"/>
                 </a:solidFill>
@@ -5628,8 +5269,8 @@
         </p:nvSpPr>
         <p:spPr>
           <a:xfrm>
-            <a:off x="548640" y="1078992"/>
-            <a:ext cx="11094415" cy="18288"/>
+            <a:off x="640080" y="1170432"/>
+            <a:ext cx="10911535" cy="18288"/>
           </a:xfrm>
           <a:prstGeom prst="rect">
             <a:avLst/>
@@ -5671,12 +5312,12 @@
         </p:nvSpPr>
         <p:spPr>
           <a:xfrm>
-            <a:off x="548640" y="1280160"/>
-            <a:ext cx="11064240" cy="2331720"/>
+            <a:off x="640080" y="1463040"/>
+            <a:ext cx="10881360" cy="2103120"/>
           </a:xfrm>
           <a:prstGeom prst="roundRect">
             <a:avLst>
-              <a:gd name="adj" fmla="val 2000"/>
+              <a:gd name="adj" fmla="val 2500"/>
             </a:avLst>
           </a:prstGeom>
           <a:solidFill>
@@ -5718,8 +5359,8 @@
         </p:nvSpPr>
         <p:spPr>
           <a:xfrm>
-            <a:off x="713232" y="1389888"/>
-            <a:ext cx="10735056" cy="2112263"/>
+            <a:off x="859536" y="1627632"/>
+            <a:ext cx="10442448" cy="1810511"/>
           </a:xfrm>
           <a:prstGeom prst="rect">
             <a:avLst/>
@@ -5734,9 +5375,9 @@
           <a:p>
             <a:pPr>
               <a:spcAft>
-                <a:spcPts val="400"/>
+                <a:spcPts val="800"/>
               </a:spcAft>
-              <a:defRPr sz="1250" b="1">
+              <a:defRPr sz="1400" b="1">
                 <a:solidFill>
                   <a:srgbClr val="60A5FA"/>
                 </a:solidFill>
@@ -5744,15 +5385,15 @@
               </a:defRPr>
             </a:pPr>
             <a:r>
-              <a:t>Token Stream &amp; Label Masking Inside trl.SFTTrainer (completion_only_loss=True)</a:t>
+              <a:t>Token Sequence Inside trl.SFTTrainer (completion_only_loss=True)</a:t>
             </a:r>
           </a:p>
           <a:p>
             <a:pPr>
               <a:spcAft>
-                <a:spcPts val="100"/>
+                <a:spcPts val="200"/>
               </a:spcAft>
-              <a:defRPr sz="1050">
+              <a:defRPr sz="1150">
                 <a:solidFill>
                   <a:srgbClr val="E2E8F0"/>
                 </a:solidFill>
@@ -5760,15 +5401,15 @@
               </a:defRPr>
             </a:pPr>
             <a:r>
-              <a:t>Input IDs :  &lt;bos&gt; &lt;start_of_turn&gt;user\n [ ~860 Guideline &amp; Review Tokens ] &lt;end_of_turn&gt;\n &lt;start_of_turn&gt;model\n {"labels": ["Zugfahrt:negative"]} &lt;end_of_turn&gt;\n</a:t>
+              <a:t>Tokens : &lt;bos&gt; &lt;start_of_turn&gt;user ... [~860 Prompt Tokens] ... &lt;start_of_turn&gt;model\n {"labels": ["Zugfahrt:negative"]} &lt;end_of_turn&gt;</a:t>
             </a:r>
           </a:p>
           <a:p>
             <a:pPr>
               <a:spcAft>
-                <a:spcPts val="100"/>
+                <a:spcPts val="200"/>
               </a:spcAft>
-              <a:defRPr sz="1050">
+              <a:defRPr sz="1150">
                 <a:solidFill>
                   <a:srgbClr val="E2E8F0"/>
                 </a:solidFill>
@@ -5776,15 +5417,15 @@
               </a:defRPr>
             </a:pPr>
             <a:r>
-              <a:t>Labels    :  -100       -100                             -100                    -100            -100        -100   "{"  "labels" ... "Zugfahrt:negative" "]}" &lt;end_of_turn&gt;</a:t>
+              <a:t>Labels : -100       -100                      -100                   -100        -100   "{"  "labels" ... "Zugfahrt:negative" "]}" &lt;end_of_turn&gt;</a:t>
             </a:r>
           </a:p>
           <a:p>
             <a:pPr>
               <a:spcAft>
-                <a:spcPts val="100"/>
+                <a:spcPts val="200"/>
               </a:spcAft>
-              <a:defRPr sz="1050">
+              <a:defRPr sz="1150">
                 <a:solidFill>
                   <a:srgbClr val="E2E8F0"/>
                 </a:solidFill>
@@ -5792,15 +5433,15 @@
               </a:defRPr>
             </a:pPr>
             <a:r>
-              <a:t>             └───────────────────────────────────────────────────┬───────────────────────────────────────────────┘  └──────────────────────┬──────────────────────┘</a:t>
+              <a:t>         └──────────────────────────────────────┬────────────────────────────────────┘  └──────────────────────┬──────────────────────┘</a:t>
             </a:r>
           </a:p>
           <a:p>
             <a:pPr>
               <a:spcAft>
-                <a:spcPts val="100"/>
+                <a:spcPts val="200"/>
               </a:spcAft>
-              <a:defRPr sz="1050">
+              <a:defRPr sz="1150">
                 <a:solidFill>
                   <a:srgbClr val="E2E8F0"/>
                 </a:solidFill>
@@ -5808,23 +5449,7 @@
               </a:defRPr>
             </a:pPr>
             <a:r>
-              <a:t>                                      MASKED OUT (PyTorch ignore_index = -100)                                            ACTIVE CROSS-ENTROPY LOSS (~15-25 Tokens)</a:t>
-            </a:r>
-          </a:p>
-          <a:p>
-            <a:pPr>
-              <a:spcAft>
-                <a:spcPts val="100"/>
-              </a:spcAft>
-              <a:defRPr sz="1050">
-                <a:solidFill>
-                  <a:srgbClr val="E2E8F0"/>
-                </a:solidFill>
-                <a:latin typeface="Courier New"/>
-              </a:defRPr>
-            </a:pPr>
-            <a:r>
-              <a:t>                                    0% of Gradient Signal (Never memorize prompt!)                                     100% of Backprop Updates LoRA Matrices A &amp; B</a:t>
+              <a:t>                            IGNORED BY LOSS (PyTorch ignore_index = -100)                          ACTIVE CROSS-ENTROPY LOSS (~20 Tokens)</a:t>
             </a:r>
           </a:p>
         </p:txBody>
@@ -5837,12 +5462,12 @@
         </p:nvSpPr>
         <p:spPr>
           <a:xfrm>
-            <a:off x="548640" y="3840480"/>
-            <a:ext cx="5394960" cy="2560320"/>
+            <a:off x="640080" y="3840480"/>
+            <a:ext cx="5257800" cy="2377440"/>
           </a:xfrm>
           <a:prstGeom prst="roundRect">
             <a:avLst>
-              <a:gd name="adj" fmla="val 2000"/>
+              <a:gd name="adj" fmla="val 2500"/>
             </a:avLst>
           </a:prstGeom>
           <a:solidFill>
@@ -5884,8 +5509,8 @@
         </p:nvSpPr>
         <p:spPr>
           <a:xfrm>
-            <a:off x="548640" y="3913632"/>
-            <a:ext cx="73152" cy="2414015"/>
+            <a:off x="640080" y="3931920"/>
+            <a:ext cx="82296" cy="2194560"/>
           </a:xfrm>
           <a:prstGeom prst="rect">
             <a:avLst/>
@@ -5927,8 +5552,8 @@
         </p:nvSpPr>
         <p:spPr>
           <a:xfrm>
-            <a:off x="749808" y="3968496"/>
-            <a:ext cx="5074920" cy="2340863"/>
+            <a:off x="896112" y="4023360"/>
+            <a:ext cx="4846320" cy="2057400"/>
           </a:xfrm>
           <a:prstGeom prst="rect">
             <a:avLst/>
@@ -5943,9 +5568,9 @@
           <a:p>
             <a:pPr>
               <a:spcAft>
-                <a:spcPts val="600"/>
+                <a:spcPts val="1000"/>
               </a:spcAft>
-              <a:defRPr sz="1600" b="1">
+              <a:defRPr sz="1900" b="1">
                 <a:solidFill>
                   <a:srgbClr val="2563EB"/>
                 </a:solidFill>
@@ -5953,91 +5578,63 @@
               </a:defRPr>
             </a:pPr>
             <a:r>
-              <a:t>Gemma-2-2B-IT Native Turn Formatting</a:t>
+              <a:t>The 50:1 Token Asymmetry Problem</a:t>
             </a:r>
           </a:p>
           <a:p>
             <a:pPr>
               <a:spcAft>
-                <a:spcPts val="400"/>
+                <a:spcPts val="800"/>
               </a:spcAft>
               <a:defRPr>
                 <a:latin typeface="Calibri"/>
               </a:defRPr>
             </a:pPr>
             <a:r>
-              <a:rPr b="1" sz="1300">
+              <a:rPr b="1" sz="1500">
                 <a:solidFill>
                   <a:srgbClr val="0F172A"/>
                 </a:solidFill>
                 <a:latin typeface="Calibri"/>
               </a:rPr>
-              <a:t>• No Separate System Role: </a:t>
-            </a:r>
-            <a:r>
-              <a:rPr b="0" sz="1300">
+              <a:t>• Long Prompt (~860 tokens): </a:t>
+            </a:r>
+            <a:r>
+              <a:rPr b="0" sz="1500">
                 <a:solidFill>
                   <a:srgbClr val="334155"/>
                 </a:solidFill>
                 <a:latin typeface="Calibri"/>
               </a:rPr>
-              <a:t>Gemma-2 only supports alternating user and model turns wrapped in &lt;start_of_turn&gt; and &lt;end_of_turn&gt;.</a:t>
+              <a:t>Contains static task rules, 19 categories, and review text.</a:t>
             </a:r>
           </a:p>
           <a:p>
             <a:pPr>
               <a:spcAft>
-                <a:spcPts val="400"/>
+                <a:spcPts val="800"/>
               </a:spcAft>
               <a:defRPr>
                 <a:latin typeface="Calibri"/>
               </a:defRPr>
             </a:pPr>
             <a:r>
-              <a:rPr b="1" sz="1300">
+              <a:rPr b="1" sz="1500">
                 <a:solidFill>
                   <a:srgbClr val="0F172A"/>
                 </a:solidFill>
                 <a:latin typeface="Calibri"/>
               </a:rPr>
-              <a:t>• Unified Instruction Block: </a:t>
-            </a:r>
-            <a:r>
-              <a:rPr b="0" sz="1300">
+              <a:t>• Short Answer (~20 tokens): </a:t>
+            </a:r>
+            <a:r>
+              <a:rPr b="0" sz="1500">
                 <a:solidFill>
                   <a:srgbClr val="334155"/>
                 </a:solidFill>
                 <a:latin typeface="Calibri"/>
               </a:rPr>
-              <a:t>We merge the German task guidelines, the 19 category definitions, and the input review into the user turn.</a:t>
-            </a:r>
-          </a:p>
-          <a:p>
-            <a:pPr>
-              <a:spcAft>
-                <a:spcPts val="400"/>
-              </a:spcAft>
-              <a:defRPr>
-                <a:latin typeface="Calibri"/>
-              </a:defRPr>
-            </a:pPr>
-            <a:r>
-              <a:rPr b="1" sz="1300">
-                <a:solidFill>
-                  <a:srgbClr val="0F172A"/>
-                </a:solidFill>
-                <a:latin typeface="Calibri"/>
-              </a:rPr>
-              <a:t>• Train-Test Parity: </a:t>
-            </a:r>
-            <a:r>
-              <a:rPr b="0" sz="1300">
-                <a:solidFill>
-                  <a:srgbClr val="334155"/>
-                </a:solidFill>
-                <a:latin typeface="Calibri"/>
-              </a:rPr>
-              <a:t>The exact same prompt wrapper (format_gemma_chat_string) is used during Zero-Shot evaluation and SFT training.</a:t>
+              <a:t>Contains only the compact JSON classification.</a:t>
             </a:r>
           </a:p>
         </p:txBody>
@@ -6050,12 +5647,12 @@
         </p:nvSpPr>
         <p:spPr>
           <a:xfrm>
-            <a:off x="6217920" y="3840480"/>
-            <a:ext cx="5394960" cy="2560320"/>
+            <a:off x="6263640" y="3840480"/>
+            <a:ext cx="5257800" cy="2377440"/>
           </a:xfrm>
           <a:prstGeom prst="roundRect">
             <a:avLst>
-              <a:gd name="adj" fmla="val 2000"/>
+              <a:gd name="adj" fmla="val 2500"/>
             </a:avLst>
           </a:prstGeom>
           <a:solidFill>
@@ -6097,8 +5694,8 @@
         </p:nvSpPr>
         <p:spPr>
           <a:xfrm>
-            <a:off x="6217920" y="3913632"/>
-            <a:ext cx="73152" cy="2414015"/>
+            <a:off x="6263640" y="3931920"/>
+            <a:ext cx="82296" cy="2194560"/>
           </a:xfrm>
           <a:prstGeom prst="rect">
             <a:avLst/>
@@ -6140,8 +5737,8 @@
         </p:nvSpPr>
         <p:spPr>
           <a:xfrm>
-            <a:off x="6419088" y="3968496"/>
-            <a:ext cx="5074920" cy="2340863"/>
+            <a:off x="6519672" y="4023360"/>
+            <a:ext cx="4846320" cy="2057400"/>
           </a:xfrm>
           <a:prstGeom prst="rect">
             <a:avLst/>
@@ -6156,9 +5753,9 @@
           <a:p>
             <a:pPr>
               <a:spcAft>
-                <a:spcPts val="600"/>
+                <a:spcPts val="1000"/>
               </a:spcAft>
-              <a:defRPr sz="1600" b="1">
+              <a:defRPr sz="1900" b="1">
                 <a:solidFill>
                   <a:srgbClr val="0D9488"/>
                 </a:solidFill>
@@ -6166,91 +5763,63 @@
               </a:defRPr>
             </a:pPr>
             <a:r>
-              <a:t>Why Completion-Only Loss Matters</a:t>
+              <a:t>Why Masking Prompt Tokens Works</a:t>
             </a:r>
           </a:p>
           <a:p>
             <a:pPr>
               <a:spcAft>
-                <a:spcPts val="400"/>
+                <a:spcPts val="800"/>
               </a:spcAft>
               <a:defRPr>
                 <a:latin typeface="Calibri"/>
               </a:defRPr>
             </a:pPr>
             <a:r>
-              <a:rPr b="1" sz="1300">
+              <a:rPr b="1" sz="1500">
                 <a:solidFill>
                   <a:srgbClr val="0F172A"/>
                 </a:solidFill>
                 <a:latin typeface="Calibri"/>
               </a:rPr>
-              <a:t>• 50:1 Length Asymmetry: </a:t>
-            </a:r>
-            <a:r>
-              <a:rPr b="0" sz="1300">
+              <a:t>• Zero Wasted Capacity: </a:t>
+            </a:r>
+            <a:r>
+              <a:rPr b="0" sz="1500">
                 <a:solidFill>
                   <a:srgbClr val="334155"/>
                 </a:solidFill>
                 <a:latin typeface="Calibri"/>
               </a:rPr>
-              <a:t>The German guideline prompt is ~860 tokens long, while the target JSON output is only ~15–25 tokens.</a:t>
+              <a:t>Adapter never wastes gradients memorizing the German prompt.</a:t>
             </a:r>
           </a:p>
           <a:p>
             <a:pPr>
               <a:spcAft>
-                <a:spcPts val="400"/>
+                <a:spcPts val="800"/>
               </a:spcAft>
               <a:defRPr>
                 <a:latin typeface="Calibri"/>
               </a:defRPr>
             </a:pPr>
             <a:r>
-              <a:rPr b="1" sz="1300">
+              <a:rPr b="1" sz="1500">
                 <a:solidFill>
                   <a:srgbClr val="0F172A"/>
                 </a:solidFill>
                 <a:latin typeface="Calibri"/>
               </a:rPr>
-              <a:t>• Without Masking: </a:t>
-            </a:r>
-            <a:r>
-              <a:rPr b="0" sz="1300">
+              <a:t>• Fast Convergence: </a:t>
+            </a:r>
+            <a:r>
+              <a:rPr b="0" sz="1500">
                 <a:solidFill>
                   <a:srgbClr val="334155"/>
                 </a:solidFill>
                 <a:latin typeface="Calibri"/>
               </a:rPr>
-              <a:t>97% of gradient updates would be wasted teaching the model to predict our static German instructions.</a:t>
-            </a:r>
-          </a:p>
-          <a:p>
-            <a:pPr>
-              <a:spcAft>
-                <a:spcPts val="400"/>
-              </a:spcAft>
-              <a:defRPr>
-                <a:latin typeface="Calibri"/>
-              </a:defRPr>
-            </a:pPr>
-            <a:r>
-              <a:rPr b="1" sz="1300">
-                <a:solidFill>
-                  <a:srgbClr val="0F172A"/>
-                </a:solidFill>
-                <a:latin typeface="Calibri"/>
-              </a:rPr>
-              <a:t>• With Masking (labels = -100): </a:t>
-            </a:r>
-            <a:r>
-              <a:rPr b="0" sz="1300">
-                <a:solidFill>
-                  <a:srgbClr val="334155"/>
-                </a:solidFill>
-                <a:latin typeface="Calibri"/>
-              </a:rPr>
-              <a:t>PyTorch CrossEntropyLoss ignores all positions with label -100, focusing 100% of adapter capacity on JSON classification.</a:t>
+              <a:t>100% of backpropagation directly optimizes JSON label prediction.</a:t>
             </a:r>
           </a:p>
         </p:txBody>
@@ -6324,8 +5893,8 @@
         </p:nvSpPr>
         <p:spPr>
           <a:xfrm>
-            <a:off x="548640" y="228600"/>
-            <a:ext cx="10241280" cy="777240"/>
+            <a:off x="640080" y="256032"/>
+            <a:ext cx="10058400" cy="868680"/>
           </a:xfrm>
           <a:prstGeom prst="rect">
             <a:avLst/>
@@ -6339,7 +5908,7 @@
           <a:lstStyle/>
           <a:p>
             <a:pPr>
-              <a:defRPr sz="2600" b="1">
+              <a:defRPr sz="2800" b="1">
                 <a:solidFill>
                   <a:srgbClr val="0F172A"/>
                 </a:solidFill>
@@ -6347,12 +5916,12 @@
               </a:defRPr>
             </a:pPr>
             <a:r>
-              <a:t>4. Core Concept II — Low-Rank Adaptation (LoRA) Architecture</a:t>
-            </a:r>
-          </a:p>
-          <a:p>
-            <a:pPr>
-              <a:defRPr sz="1350">
+              <a:t>4. Core Concept II — Low-Rank Adaptation (LoRA)</a:t>
+            </a:r>
+          </a:p>
+          <a:p>
+            <a:pPr>
+              <a:defRPr sz="1500">
                 <a:solidFill>
                   <a:srgbClr val="64748B"/>
                 </a:solidFill>
@@ -6360,7 +5929,7 @@
               </a:defRPr>
             </a:pPr>
             <a:r>
-              <a:t>Injecting trainable rank-16 bottleneck matrices (A, B) in parallel with frozen pretrained weights W_0</a:t>
+              <a:t>Freezing 2.61B base weights and training rank-16 bypass matrices (A, B)</a:t>
             </a:r>
           </a:p>
         </p:txBody>
@@ -6373,8 +5942,8 @@
         </p:nvSpPr>
         <p:spPr>
           <a:xfrm>
-            <a:off x="10789920" y="274320"/>
-            <a:ext cx="914400" cy="365760"/>
+            <a:off x="10698480" y="292608"/>
+            <a:ext cx="868680" cy="365760"/>
           </a:xfrm>
           <a:prstGeom prst="rect">
             <a:avLst/>
@@ -6388,7 +5957,7 @@
           <a:lstStyle/>
           <a:p>
             <a:pPr algn="r">
-              <a:defRPr sz="1200" b="1">
+              <a:defRPr sz="1300" b="1">
                 <a:solidFill>
                   <a:srgbClr val="64748B"/>
                 </a:solidFill>
@@ -6409,8 +5978,8 @@
         </p:nvSpPr>
         <p:spPr>
           <a:xfrm>
-            <a:off x="548640" y="1078992"/>
-            <a:ext cx="11094415" cy="18288"/>
+            <a:off x="640080" y="1170432"/>
+            <a:ext cx="10911535" cy="18288"/>
           </a:xfrm>
           <a:prstGeom prst="rect">
             <a:avLst/>
@@ -6452,12 +6021,12 @@
         </p:nvSpPr>
         <p:spPr>
           <a:xfrm>
-            <a:off x="548640" y="1280160"/>
-            <a:ext cx="5760720" cy="5120640"/>
+            <a:off x="640080" y="1463040"/>
+            <a:ext cx="5577840" cy="4754880"/>
           </a:xfrm>
           <a:prstGeom prst="roundRect">
             <a:avLst>
-              <a:gd name="adj" fmla="val 2000"/>
+              <a:gd name="adj" fmla="val 2500"/>
             </a:avLst>
           </a:prstGeom>
           <a:solidFill>
@@ -6499,8 +6068,8 @@
         </p:nvSpPr>
         <p:spPr>
           <a:xfrm>
-            <a:off x="713232" y="1389888"/>
-            <a:ext cx="5431536" cy="4901183"/>
+            <a:off x="859536" y="1627632"/>
+            <a:ext cx="5138927" cy="4462272"/>
           </a:xfrm>
           <a:prstGeom prst="rect">
             <a:avLst/>
@@ -6515,9 +6084,9 @@
           <a:p>
             <a:pPr>
               <a:spcAft>
-                <a:spcPts val="400"/>
+                <a:spcPts val="800"/>
               </a:spcAft>
-              <a:defRPr sz="1250" b="1">
+              <a:defRPr sz="1400" b="1">
                 <a:solidFill>
                   <a:srgbClr val="60A5FA"/>
                 </a:solidFill>
@@ -6525,15 +6094,15 @@
               </a:defRPr>
             </a:pPr>
             <a:r>
-              <a:t>Inside Every Linear Projection Layer: Frozen W_0 + LoRA Bypass</a:t>
+              <a:t>LoRA Bypass Inside Every Linear Layer</a:t>
             </a:r>
           </a:p>
           <a:p>
             <a:pPr>
               <a:spcAft>
-                <a:spcPts val="100"/>
+                <a:spcPts val="200"/>
               </a:spcAft>
-              <a:defRPr sz="1000">
+              <a:defRPr sz="1100">
                 <a:solidFill>
                   <a:srgbClr val="E2E8F0"/>
                 </a:solidFill>
@@ -6541,15 +6110,15 @@
               </a:defRPr>
             </a:pPr>
             <a:r>
-              <a:t>              Output Activation: h = h_base + (alpha / r) * h_lora</a:t>
+              <a:t>        Output: h = W_0·x + (alpha / r) · B·(A·x)</a:t>
             </a:r>
           </a:p>
           <a:p>
             <a:pPr>
               <a:spcAft>
-                <a:spcPts val="100"/>
+                <a:spcPts val="200"/>
               </a:spcAft>
-              <a:defRPr sz="1000">
+              <a:defRPr sz="1100">
                 <a:solidFill>
                   <a:srgbClr val="E2E8F0"/>
                 </a:solidFill>
@@ -6557,15 +6126,15 @@
               </a:defRPr>
             </a:pPr>
             <a:r>
-              <a:t>                                     ▲</a:t>
+              <a:t>                            ▲</a:t>
             </a:r>
           </a:p>
           <a:p>
             <a:pPr>
               <a:spcAft>
-                <a:spcPts val="100"/>
+                <a:spcPts val="200"/>
               </a:spcAft>
-              <a:defRPr sz="1000">
+              <a:defRPr sz="1100">
                 <a:solidFill>
                   <a:srgbClr val="E2E8F0"/>
                 </a:solidFill>
@@ -6573,15 +6142,15 @@
               </a:defRPr>
             </a:pPr>
             <a:r>
-              <a:t>                                     │</a:t>
+              <a:t>                           (+)  ◄── Sum in bfloat16</a:t>
             </a:r>
           </a:p>
           <a:p>
             <a:pPr>
               <a:spcAft>
-                <a:spcPts val="100"/>
+                <a:spcPts val="200"/>
               </a:spcAft>
-              <a:defRPr sz="1000">
+              <a:defRPr sz="1100">
                 <a:solidFill>
                   <a:srgbClr val="E2E8F0"/>
                 </a:solidFill>
@@ -6589,15 +6158,15 @@
               </a:defRPr>
             </a:pPr>
             <a:r>
-              <a:t>                                    (+)  ◄── Elementwise Sum (bfloat16)</a:t>
+              <a:t>                          ╱   ╲</a:t>
             </a:r>
           </a:p>
           <a:p>
             <a:pPr>
               <a:spcAft>
-                <a:spcPts val="100"/>
+                <a:spcPts val="200"/>
               </a:spcAft>
-              <a:defRPr sz="1000">
+              <a:defRPr sz="1100">
                 <a:solidFill>
                   <a:srgbClr val="E2E8F0"/>
                 </a:solidFill>
@@ -6605,15 +6174,15 @@
               </a:defRPr>
             </a:pPr>
             <a:r>
-              <a:t>                                   ╱   ╲</a:t>
+              <a:t>      ┌──────────────────┘     └──────────────────┐</a:t>
             </a:r>
           </a:p>
           <a:p>
             <a:pPr>
               <a:spcAft>
-                <a:spcPts val="100"/>
+                <a:spcPts val="200"/>
               </a:spcAft>
-              <a:defRPr sz="1000">
+              <a:defRPr sz="1100">
                 <a:solidFill>
                   <a:srgbClr val="E2E8F0"/>
                 </a:solidFill>
@@ -6621,15 +6190,15 @@
               </a:defRPr>
             </a:pPr>
             <a:r>
-              <a:t>       ┌──────────────────────────┘     └─────────────────────────┐</a:t>
+              <a:t>┌─────┴───────────────────┐   ┌───────────────────┴─────┐</a:t>
             </a:r>
           </a:p>
           <a:p>
             <a:pPr>
               <a:spcAft>
-                <a:spcPts val="100"/>
+                <a:spcPts val="200"/>
               </a:spcAft>
-              <a:defRPr sz="1000">
+              <a:defRPr sz="1100">
                 <a:solidFill>
                   <a:srgbClr val="E2E8F0"/>
                 </a:solidFill>
@@ -6637,15 +6206,15 @@
               </a:defRPr>
             </a:pPr>
             <a:r>
-              <a:t>       │  h_base = W_0 * x               h_lora = B * (A * x)     │</a:t>
+              <a:t>│  FROZEN BASE WEIGHT W_0 │   │  TRAINABLE LoRA (B · A) │</a:t>
             </a:r>
           </a:p>
           <a:p>
             <a:pPr>
               <a:spcAft>
-                <a:spcPts val="100"/>
+                <a:spcPts val="200"/>
               </a:spcAft>
-              <a:defRPr sz="1000">
+              <a:defRPr sz="1100">
                 <a:solidFill>
                   <a:srgbClr val="E2E8F0"/>
                 </a:solidFill>
@@ -6653,15 +6222,15 @@
               </a:defRPr>
             </a:pPr>
             <a:r>
-              <a:t>┌──────┴──────────────────────┐           ┌───────────────────────┴──────┐</a:t>
+              <a:t>│ • [d_out x d_in]        │   │ • B: [d_out x 16] (= 0) │</a:t>
             </a:r>
           </a:p>
           <a:p>
             <a:pPr>
               <a:spcAft>
-                <a:spcPts val="100"/>
+                <a:spcPts val="200"/>
               </a:spcAft>
-              <a:defRPr sz="1000">
+              <a:defRPr sz="1100">
                 <a:solidFill>
                   <a:srgbClr val="E2E8F0"/>
                 </a:solidFill>
@@ -6669,15 +6238,15 @@
               </a:defRPr>
             </a:pPr>
             <a:r>
-              <a:t>│   FROZEN BASE WEIGHT W_0    │           │  TRAINABLE LoRA ADAPTER B·A  │</a:t>
+              <a:t>│ • 16-bit OR 4-bit NF4   │   │ • A: [16 x d_in]  (~ N) │</a:t>
             </a:r>
           </a:p>
           <a:p>
             <a:pPr>
               <a:spcAft>
-                <a:spcPts val="100"/>
+                <a:spcPts val="200"/>
               </a:spcAft>
-              <a:defRPr sz="1000">
+              <a:defRPr sz="1100">
                 <a:solidFill>
                   <a:srgbClr val="E2E8F0"/>
                 </a:solidFill>
@@ -6685,15 +6254,15 @@
               </a:defRPr>
             </a:pPr>
             <a:r>
-              <a:t>│ • Shape: [d_out x d_in]     │           │ • Matrix B: [d_out x r=16]   │</a:t>
+              <a:t>│ • requires_grad = False │   │ • requires_grad = True  │</a:t>
             </a:r>
           </a:p>
           <a:p>
             <a:pPr>
               <a:spcAft>
-                <a:spcPts val="100"/>
+                <a:spcPts val="200"/>
               </a:spcAft>
-              <a:defRPr sz="1000">
+              <a:defRPr sz="1100">
                 <a:solidFill>
                   <a:srgbClr val="E2E8F0"/>
                 </a:solidFill>
@@ -6701,15 +6270,15 @@
               </a:defRPr>
             </a:pPr>
             <a:r>
-              <a:t>│ • 16-bit bf16 OR 4-bit NF4  │           │   (Initialized to zeros: 0)  │</a:t>
+              <a:t>│ • 0 optimizer states    │   │ • Updated by AdamW      │</a:t>
             </a:r>
           </a:p>
           <a:p>
             <a:pPr>
               <a:spcAft>
-                <a:spcPts val="100"/>
+                <a:spcPts val="200"/>
               </a:spcAft>
-              <a:defRPr sz="1000">
+              <a:defRPr sz="1100">
                 <a:solidFill>
                   <a:srgbClr val="E2E8F0"/>
                 </a:solidFill>
@@ -6717,15 +6286,15 @@
               </a:defRPr>
             </a:pPr>
             <a:r>
-              <a:t>│ • requires_grad = False     │           │ • Matrix A: [r=16 x d_in]    │</a:t>
+              <a:t>└─────▲───────────────────┘   └───────────────────▲─────┘</a:t>
             </a:r>
           </a:p>
           <a:p>
             <a:pPr>
               <a:spcAft>
-                <a:spcPts val="100"/>
+                <a:spcPts val="200"/>
               </a:spcAft>
-              <a:defRPr sz="1000">
+              <a:defRPr sz="1100">
                 <a:solidFill>
                   <a:srgbClr val="E2E8F0"/>
                 </a:solidFill>
@@ -6733,15 +6302,15 @@
               </a:defRPr>
             </a:pPr>
             <a:r>
-              <a:t>│ • 0 optimizer states        │           │   (Initialized ~ N(0, sigma²))│</a:t>
+              <a:t>      └──────────────────┐     ┌──────────────────┘</a:t>
             </a:r>
           </a:p>
           <a:p>
             <a:pPr>
               <a:spcAft>
-                <a:spcPts val="100"/>
+                <a:spcPts val="200"/>
               </a:spcAft>
-              <a:defRPr sz="1000">
+              <a:defRPr sz="1100">
                 <a:solidFill>
                   <a:srgbClr val="E2E8F0"/>
                 </a:solidFill>
@@ -6749,15 +6318,15 @@
               </a:defRPr>
             </a:pPr>
             <a:r>
-              <a:t>│ • Preserves pretrained      │           │ • Always in 16-bit bfloat16  │</a:t>
+              <a:t>                          ╲   ╱</a:t>
             </a:r>
           </a:p>
           <a:p>
             <a:pPr>
               <a:spcAft>
-                <a:spcPts val="100"/>
+                <a:spcPts val="200"/>
               </a:spcAft>
-              <a:defRPr sz="1000">
+              <a:defRPr sz="1100">
                 <a:solidFill>
                   <a:srgbClr val="E2E8F0"/>
                 </a:solidFill>
@@ -6765,71 +6334,7 @@
               </a:defRPr>
             </a:pPr>
             <a:r>
-              <a:t>│   German language knowledge │           │ • Updated by AdamW optimizer │</a:t>
-            </a:r>
-          </a:p>
-          <a:p>
-            <a:pPr>
-              <a:spcAft>
-                <a:spcPts val="100"/>
-              </a:spcAft>
-              <a:defRPr sz="1000">
-                <a:solidFill>
-                  <a:srgbClr val="E2E8F0"/>
-                </a:solidFill>
-                <a:latin typeface="Courier New"/>
-              </a:defRPr>
-            </a:pPr>
-            <a:r>
-              <a:t>└──────▲──────────────────────┘           └───────────────▲──────────────┘</a:t>
-            </a:r>
-          </a:p>
-          <a:p>
-            <a:pPr>
-              <a:spcAft>
-                <a:spcPts val="100"/>
-              </a:spcAft>
-              <a:defRPr sz="1000">
-                <a:solidFill>
-                  <a:srgbClr val="E2E8F0"/>
-                </a:solidFill>
-                <a:latin typeface="Courier New"/>
-              </a:defRPr>
-            </a:pPr>
-            <a:r>
-              <a:t>       └──────────────────────────┐     ┌─────────────────┘</a:t>
-            </a:r>
-          </a:p>
-          <a:p>
-            <a:pPr>
-              <a:spcAft>
-                <a:spcPts val="100"/>
-              </a:spcAft>
-              <a:defRPr sz="1000">
-                <a:solidFill>
-                  <a:srgbClr val="E2E8F0"/>
-                </a:solidFill>
-                <a:latin typeface="Courier New"/>
-              </a:defRPr>
-            </a:pPr>
-            <a:r>
-              <a:t>                                   ╲   ╱</a:t>
-            </a:r>
-          </a:p>
-          <a:p>
-            <a:pPr>
-              <a:spcAft>
-                <a:spcPts val="100"/>
-              </a:spcAft>
-              <a:defRPr sz="1000">
-                <a:solidFill>
-                  <a:srgbClr val="E2E8F0"/>
-                </a:solidFill>
-                <a:latin typeface="Courier New"/>
-              </a:defRPr>
-            </a:pPr>
-            <a:r>
-              <a:t>                           Input Activation x (bfloat16)</a:t>
+              <a:t>                   Input Activation x</a:t>
             </a:r>
           </a:p>
         </p:txBody>
@@ -6842,12 +6347,12 @@
         </p:nvSpPr>
         <p:spPr>
           <a:xfrm>
-            <a:off x="6492240" y="1280160"/>
-            <a:ext cx="5120640" cy="5120640"/>
+            <a:off x="6492240" y="1463040"/>
+            <a:ext cx="5029200" cy="4754880"/>
           </a:xfrm>
           <a:prstGeom prst="roundRect">
             <a:avLst>
-              <a:gd name="adj" fmla="val 2000"/>
+              <a:gd name="adj" fmla="val 2500"/>
             </a:avLst>
           </a:prstGeom>
           <a:solidFill>
@@ -6889,8 +6394,8 @@
         </p:nvSpPr>
         <p:spPr>
           <a:xfrm>
-            <a:off x="6492240" y="1353312"/>
-            <a:ext cx="73152" cy="4974336"/>
+            <a:off x="6492240" y="1554480"/>
+            <a:ext cx="82296" cy="4572000"/>
           </a:xfrm>
           <a:prstGeom prst="rect">
             <a:avLst/>
@@ -6932,8 +6437,8 @@
         </p:nvSpPr>
         <p:spPr>
           <a:xfrm>
-            <a:off x="6693407" y="1408176"/>
-            <a:ext cx="4800600" cy="4901183"/>
+            <a:off x="6748272" y="1645920"/>
+            <a:ext cx="4617720" cy="4434840"/>
           </a:xfrm>
           <a:prstGeom prst="rect">
             <a:avLst/>
@@ -6948,9 +6453,9 @@
           <a:p>
             <a:pPr>
               <a:spcAft>
-                <a:spcPts val="600"/>
+                <a:spcPts val="1000"/>
               </a:spcAft>
-              <a:defRPr sz="1600" b="1">
+              <a:defRPr sz="1900" b="1">
                 <a:solidFill>
                   <a:srgbClr val="0D9488"/>
                 </a:solidFill>
@@ -6958,147 +6463,119 @@
               </a:defRPr>
             </a:pPr>
             <a:r>
-              <a:t>How LoRA Works Mathematically &amp; Architecturally</a:t>
+              <a:t>Key Properties of Our LoRA Setup</a:t>
             </a:r>
           </a:p>
           <a:p>
             <a:pPr>
               <a:spcAft>
-                <a:spcPts val="400"/>
+                <a:spcPts val="800"/>
               </a:spcAft>
               <a:defRPr>
                 <a:latin typeface="Calibri"/>
               </a:defRPr>
             </a:pPr>
             <a:r>
-              <a:rPr b="1" sz="1300">
+              <a:rPr b="1" sz="1500">
                 <a:solidFill>
                   <a:srgbClr val="0F172A"/>
                 </a:solidFill>
                 <a:latin typeface="Calibri"/>
               </a:rPr>
-              <a:t>• The Forward Pass Equation: </a:t>
-            </a:r>
-            <a:r>
-              <a:rPr b="0" sz="1300">
+              <a:t>• Low-Rank Bottleneck: </a:t>
+            </a:r>
+            <a:r>
+              <a:rPr b="0" sz="1500">
                 <a:solidFill>
                   <a:srgbClr val="334155"/>
                 </a:solidFill>
                 <a:latin typeface="Calibri"/>
               </a:rPr>
-              <a:t>h = W_0 x + (α / r) · B · A · x, where r = 16 is the rank and α = 32 is the scaling factor (α/r = 2.0).</a:t>
+              <a:t>Rank r = 16, scaling α = 32 (α/r = 2.0).</a:t>
             </a:r>
           </a:p>
           <a:p>
             <a:pPr>
               <a:spcAft>
-                <a:spcPts val="400"/>
+                <a:spcPts val="800"/>
               </a:spcAft>
               <a:defRPr>
                 <a:latin typeface="Calibri"/>
               </a:defRPr>
             </a:pPr>
             <a:r>
-              <a:rPr b="1" sz="1300">
+              <a:rPr b="1" sz="1500">
                 <a:solidFill>
                   <a:srgbClr val="0F172A"/>
                 </a:solidFill>
                 <a:latin typeface="Calibri"/>
               </a:rPr>
-              <a:t>• Safe Zero-Initialization: </a:t>
-            </a:r>
-            <a:r>
-              <a:rPr b="0" sz="1300">
+              <a:t>• Safe Initialization: </a:t>
+            </a:r>
+            <a:r>
+              <a:rPr b="0" sz="1500">
                 <a:solidFill>
                   <a:srgbClr val="334155"/>
                 </a:solidFill>
                 <a:latin typeface="Calibri"/>
               </a:rPr>
-              <a:t>Matrix A is sampled from a Gaussian; Matrix B is initialized to 0. At step 0, B·A = 0, so the model behaves identically to the pretrained base model.</a:t>
+              <a:t>B = 0 at step 0, so training starts strictly from the exact base model.</a:t>
             </a:r>
           </a:p>
           <a:p>
             <a:pPr>
               <a:spcAft>
-                <a:spcPts val="400"/>
+                <a:spcPts val="800"/>
               </a:spcAft>
               <a:defRPr>
                 <a:latin typeface="Calibri"/>
               </a:defRPr>
             </a:pPr>
             <a:r>
-              <a:rPr b="1" sz="1300">
+              <a:rPr b="1" sz="1500">
                 <a:solidFill>
                   <a:srgbClr val="0F172A"/>
                 </a:solidFill>
                 <a:latin typeface="Calibri"/>
               </a:rPr>
-              <a:t>• All 7 Linear Projections Modified per Block: </a:t>
-            </a:r>
-            <a:r>
-              <a:rPr b="0" sz="1300">
+              <a:t>• All 7 Projections Adapted: </a:t>
+            </a:r>
+            <a:r>
+              <a:rPr b="0" sz="1500">
                 <a:solidFill>
                   <a:srgbClr val="334155"/>
                 </a:solidFill>
                 <a:latin typeface="Calibri"/>
               </a:rPr>
-              <a:t>In each of the 26 Gemma-2 transformer layers, we attach LoRA to Attention (q_proj, k_proj, v_proj, o_proj) and GeGLU MLP (gate_proj, up_proj, down_proj).</a:t>
+              <a:t>Applied to Attention (q, k, v, o) and MLP (gate, up, down) across all 26 layers.</a:t>
             </a:r>
           </a:p>
           <a:p>
             <a:pPr>
               <a:spcAft>
-                <a:spcPts val="400"/>
+                <a:spcPts val="800"/>
               </a:spcAft>
               <a:defRPr>
                 <a:latin typeface="Calibri"/>
               </a:defRPr>
             </a:pPr>
             <a:r>
-              <a:rPr b="1" sz="1300">
+              <a:rPr b="1" sz="1500">
                 <a:solidFill>
                   <a:srgbClr val="0F172A"/>
                 </a:solidFill>
                 <a:latin typeface="Calibri"/>
               </a:rPr>
-              <a:t>• 99.21% Parameter Reduction: </a:t>
-            </a:r>
-            <a:r>
-              <a:rPr b="0" sz="1300">
+              <a:t>• 99.21% Parameter Savings: </a:t>
+            </a:r>
+            <a:r>
+              <a:rPr b="0" sz="1500">
                 <a:solidFill>
                   <a:srgbClr val="334155"/>
                 </a:solidFill>
                 <a:latin typeface="Calibri"/>
               </a:rPr>
-              <a:t>Frozen Base Parameters: 2,614,341,888 (99.21%) vs. Trainable LoRA Parameters: 20,766,720 (0.79% = 798,720 per layer × 26 layers).</a:t>
-            </a:r>
-          </a:p>
-          <a:p>
-            <a:pPr>
-              <a:spcAft>
-                <a:spcPts val="400"/>
-              </a:spcAft>
-              <a:defRPr>
-                <a:latin typeface="Calibri"/>
-              </a:defRPr>
-            </a:pPr>
-            <a:r>
-              <a:rPr b="1" sz="1300">
-                <a:solidFill>
-                  <a:srgbClr val="0F172A"/>
-                </a:solidFill>
-                <a:latin typeface="Calibri"/>
-              </a:rPr>
-              <a:t>• Tiny Disk Checkpoints: </a:t>
-            </a:r>
-            <a:r>
-              <a:rPr b="0" sz="1300">
-                <a:solidFill>
-                  <a:srgbClr val="334155"/>
-                </a:solidFill>
-                <a:latin typeface="Calibri"/>
-              </a:rPr>
-              <a:t>Only the 20.8M adapter parameters (~41 MB in bf16) are saved to models/adapters/, making version control and deployment effortless.</a:t>
+              <a:t>Only 20.8M trainable weights vs. 2.61B frozen base weights.</a:t>
             </a:r>
           </a:p>
         </p:txBody>
@@ -7172,8 +6649,8 @@
         </p:nvSpPr>
         <p:spPr>
           <a:xfrm>
-            <a:off x="548640" y="228600"/>
-            <a:ext cx="10241280" cy="777240"/>
+            <a:off x="640080" y="256032"/>
+            <a:ext cx="10058400" cy="868680"/>
           </a:xfrm>
           <a:prstGeom prst="rect">
             <a:avLst/>
@@ -7187,7 +6664,7 @@
           <a:lstStyle/>
           <a:p>
             <a:pPr>
-              <a:defRPr sz="2600" b="1">
+              <a:defRPr sz="2800" b="1">
                 <a:solidFill>
                   <a:srgbClr val="0F172A"/>
                 </a:solidFill>
@@ -7195,12 +6672,12 @@
               </a:defRPr>
             </a:pPr>
             <a:r>
-              <a:t>5. Core Concept III — 4-bit NormalFloat Quantization (QLoRA)</a:t>
-            </a:r>
-          </a:p>
-          <a:p>
-            <a:pPr>
-              <a:defRPr sz="1350">
+              <a:t>5. Core Concept III — 4-bit Quantization (QLoRA)</a:t>
+            </a:r>
+          </a:p>
+          <a:p>
+            <a:pPr>
+              <a:defRPr sz="1500">
                 <a:solidFill>
                   <a:srgbClr val="64748B"/>
                 </a:solidFill>
@@ -7208,7 +6685,7 @@
               </a:defRPr>
             </a:pPr>
             <a:r>
-              <a:t>How Dettmers et al. (2023) compress frozen base weights by 72% while keeping gradients in 16-bit precision</a:t>
+              <a:t>Compressing frozen base weights by 72% while keeping gradients in 16-bit</a:t>
             </a:r>
           </a:p>
         </p:txBody>
@@ -7221,8 +6698,8 @@
         </p:nvSpPr>
         <p:spPr>
           <a:xfrm>
-            <a:off x="10789920" y="274320"/>
-            <a:ext cx="914400" cy="365760"/>
+            <a:off x="10698480" y="292608"/>
+            <a:ext cx="868680" cy="365760"/>
           </a:xfrm>
           <a:prstGeom prst="rect">
             <a:avLst/>
@@ -7236,7 +6713,7 @@
           <a:lstStyle/>
           <a:p>
             <a:pPr algn="r">
-              <a:defRPr sz="1200" b="1">
+              <a:defRPr sz="1300" b="1">
                 <a:solidFill>
                   <a:srgbClr val="64748B"/>
                 </a:solidFill>
@@ -7257,8 +6734,8 @@
         </p:nvSpPr>
         <p:spPr>
           <a:xfrm>
-            <a:off x="548640" y="1078992"/>
-            <a:ext cx="11094415" cy="18288"/>
+            <a:off x="640080" y="1170432"/>
+            <a:ext cx="10911535" cy="18288"/>
           </a:xfrm>
           <a:prstGeom prst="rect">
             <a:avLst/>
@@ -7300,12 +6777,12 @@
         </p:nvSpPr>
         <p:spPr>
           <a:xfrm>
-            <a:off x="548640" y="1280160"/>
-            <a:ext cx="3566160" cy="5120640"/>
+            <a:off x="640080" y="1463040"/>
+            <a:ext cx="3474720" cy="4754880"/>
           </a:xfrm>
           <a:prstGeom prst="roundRect">
             <a:avLst>
-              <a:gd name="adj" fmla="val 2000"/>
+              <a:gd name="adj" fmla="val 2500"/>
             </a:avLst>
           </a:prstGeom>
           <a:solidFill>
@@ -7347,8 +6824,8 @@
         </p:nvSpPr>
         <p:spPr>
           <a:xfrm>
-            <a:off x="548640" y="1353312"/>
-            <a:ext cx="73152" cy="4974336"/>
+            <a:off x="640080" y="1554480"/>
+            <a:ext cx="82296" cy="4572000"/>
           </a:xfrm>
           <a:prstGeom prst="rect">
             <a:avLst/>
@@ -7390,8 +6867,8 @@
         </p:nvSpPr>
         <p:spPr>
           <a:xfrm>
-            <a:off x="749808" y="1408176"/>
-            <a:ext cx="3246120" cy="4901183"/>
+            <a:off x="896112" y="1645920"/>
+            <a:ext cx="3063239" cy="4434840"/>
           </a:xfrm>
           <a:prstGeom prst="rect">
             <a:avLst/>
@@ -7406,9 +6883,9 @@
           <a:p>
             <a:pPr>
               <a:spcAft>
-                <a:spcPts val="600"/>
+                <a:spcPts val="1000"/>
               </a:spcAft>
-              <a:defRPr sz="1600" b="1">
+              <a:defRPr sz="1900" b="1">
                 <a:solidFill>
                   <a:srgbClr val="D97706"/>
                 </a:solidFill>
@@ -7416,104 +6893,76 @@
               </a:defRPr>
             </a:pPr>
             <a:r>
-              <a:t>1. 4-Bit NormalFloat (NF4)</a:t>
+              <a:t>1. NormalFloat4 (NF4)</a:t>
             </a:r>
           </a:p>
           <a:p>
             <a:pPr>
               <a:spcAft>
-                <a:spcPts val="400"/>
+                <a:spcPts val="800"/>
               </a:spcAft>
               <a:defRPr>
                 <a:latin typeface="Calibri"/>
               </a:defRPr>
             </a:pPr>
             <a:r>
-              <a:rPr b="1" sz="1300">
+              <a:rPr b="1" sz="1500">
                 <a:solidFill>
                   <a:srgbClr val="0F172A"/>
                 </a:solidFill>
                 <a:latin typeface="Calibri"/>
               </a:rPr>
-              <a:t>• Information-Theoretic Optimal: </a:t>
-            </a:r>
-            <a:r>
-              <a:rPr b="0" sz="1300">
+              <a:t>• Bell-Curve Optimal: </a:t>
+            </a:r>
+            <a:r>
+              <a:rPr b="0" sz="1500">
                 <a:solidFill>
                   <a:srgbClr val="334155"/>
                 </a:solidFill>
                 <a:latin typeface="Calibri"/>
               </a:rPr>
-              <a:t>Pretrained neural network weights follow a zero-centered normal (Gaussian) distribution.</a:t>
+              <a:t>Pretrained weights follow a zero-centered Gaussian N(0, σ²).</a:t>
             </a:r>
           </a:p>
           <a:p>
             <a:pPr>
               <a:spcAft>
-                <a:spcPts val="400"/>
+                <a:spcPts val="800"/>
               </a:spcAft>
               <a:defRPr>
                 <a:latin typeface="Calibri"/>
               </a:defRPr>
             </a:pPr>
             <a:r>
-              <a:rPr b="1" sz="1300">
+              <a:rPr b="1" sz="1500">
                 <a:solidFill>
                   <a:srgbClr val="0F172A"/>
                 </a:solidFill>
                 <a:latin typeface="Calibri"/>
               </a:rPr>
-              <a:t>• Equal-Mass Quantiles: </a:t>
-            </a:r>
-            <a:r>
-              <a:rPr b="0" sz="1300">
+              <a:t>• 16 Quantile Bins: </a:t>
+            </a:r>
+            <a:r>
+              <a:rPr b="0" sz="1500">
                 <a:solidFill>
                   <a:srgbClr val="334155"/>
                 </a:solidFill>
                 <a:latin typeface="Calibri"/>
               </a:rPr>
-              <a:t>NF4 places its 16 quantization bins (2^4 = 16 levels) so each bin covers an equal area under N(0, 1).</a:t>
+              <a:t>Places more 4-bit bins near 0 where most weights are concentrated.</a:t>
             </a:r>
           </a:p>
           <a:p>
             <a:pPr>
               <a:spcAft>
-                <a:spcPts val="400"/>
+                <a:spcPts val="800"/>
               </a:spcAft>
               <a:defRPr>
                 <a:latin typeface="Calibri"/>
               </a:defRPr>
             </a:pPr>
             <a:r>
-              <a:rPr b="1" sz="1300">
-                <a:solidFill>
-                  <a:srgbClr val="0F172A"/>
-                </a:solidFill>
-                <a:latin typeface="Calibri"/>
-              </a:rPr>
-              <a:t>• Higher Fidelity Near Zero: </a:t>
-            </a:r>
-            <a:r>
-              <a:rPr b="0" sz="1300">
-                <a:solidFill>
-                  <a:srgbClr val="334155"/>
-                </a:solidFill>
-                <a:latin typeface="Calibri"/>
-              </a:rPr>
-              <a:t>Concentrates resolution around 0 where most weights live, outperforming uniform 4-bit integer (FP4/INT4).</a:t>
-            </a:r>
-          </a:p>
-          <a:p>
-            <a:pPr>
-              <a:spcAft>
-                <a:spcPts val="400"/>
-              </a:spcAft>
-              <a:defRPr>
-                <a:latin typeface="Calibri"/>
-              </a:defRPr>
-            </a:pPr>
-            <a:r>
-              <a:rPr b="1" sz="1300">
+              <a:rPr b="1" sz="1500">
                 <a:solidFill>
                   <a:srgbClr val="0F172A"/>
                 </a:solidFill>
@@ -7522,13 +6971,13 @@
               <a:t>• Blockwise Scaling: </a:t>
             </a:r>
             <a:r>
-              <a:rPr b="0" sz="1300">
+              <a:rPr b="0" sz="1500">
                 <a:solidFill>
                   <a:srgbClr val="334155"/>
                 </a:solidFill>
                 <a:latin typeface="Calibri"/>
               </a:rPr>
-              <a:t>Weights are normalized in blocks of 64 values so outlier weights don't distort the entire tensor.</a:t>
+              <a:t>Normalizes weights in blocks of 64 to isolate outliers.</a:t>
             </a:r>
           </a:p>
         </p:txBody>
@@ -7541,12 +6990,12 @@
         </p:nvSpPr>
         <p:spPr>
           <a:xfrm>
-            <a:off x="4297680" y="1280160"/>
-            <a:ext cx="3566160" cy="5120640"/>
+            <a:off x="4343400" y="1463040"/>
+            <a:ext cx="3474720" cy="4754880"/>
           </a:xfrm>
           <a:prstGeom prst="roundRect">
             <a:avLst>
-              <a:gd name="adj" fmla="val 2000"/>
+              <a:gd name="adj" fmla="val 2500"/>
             </a:avLst>
           </a:prstGeom>
           <a:solidFill>
@@ -7588,8 +7037,8 @@
         </p:nvSpPr>
         <p:spPr>
           <a:xfrm>
-            <a:off x="4297680" y="1353312"/>
-            <a:ext cx="73152" cy="4974336"/>
+            <a:off x="4343400" y="1554480"/>
+            <a:ext cx="82296" cy="4572000"/>
           </a:xfrm>
           <a:prstGeom prst="rect">
             <a:avLst/>
@@ -7631,8 +7080,8 @@
         </p:nvSpPr>
         <p:spPr>
           <a:xfrm>
-            <a:off x="4498848" y="1408176"/>
-            <a:ext cx="3246120" cy="4901183"/>
+            <a:off x="4599432" y="1645920"/>
+            <a:ext cx="3063239" cy="4434840"/>
           </a:xfrm>
           <a:prstGeom prst="rect">
             <a:avLst/>
@@ -7647,9 +7096,9 @@
           <a:p>
             <a:pPr>
               <a:spcAft>
-                <a:spcPts val="600"/>
+                <a:spcPts val="1000"/>
               </a:spcAft>
-              <a:defRPr sz="1600" b="1">
+              <a:defRPr sz="1900" b="1">
                 <a:solidFill>
                   <a:srgbClr val="2563EB"/>
                 </a:solidFill>
@@ -7657,91 +7106,91 @@
               </a:defRPr>
             </a:pPr>
             <a:r>
-              <a:t>2. Double Quantization (DQ)</a:t>
+              <a:t>2. Double Quantization</a:t>
             </a:r>
           </a:p>
           <a:p>
             <a:pPr>
               <a:spcAft>
-                <a:spcPts val="400"/>
+                <a:spcPts val="800"/>
               </a:spcAft>
               <a:defRPr>
                 <a:latin typeface="Calibri"/>
               </a:defRPr>
             </a:pPr>
             <a:r>
-              <a:rPr b="1" sz="1300">
+              <a:rPr b="1" sz="1500">
                 <a:solidFill>
                   <a:srgbClr val="0F172A"/>
                 </a:solidFill>
                 <a:latin typeface="Calibri"/>
               </a:rPr>
-              <a:t>• Quantizing the Scales: </a:t>
-            </a:r>
-            <a:r>
-              <a:rPr b="0" sz="1300">
+              <a:t>• Compressing Scales: </a:t>
+            </a:r>
+            <a:r>
+              <a:rPr b="0" sz="1500">
                 <a:solidFill>
                   <a:srgbClr val="334155"/>
                 </a:solidFill>
                 <a:latin typeface="Calibri"/>
               </a:rPr>
-              <a:t>Every block of 64 weights needs a scaling constant c_1. In 32-bit float, those constants add 0.5 bits per parameter.</a:t>
+              <a:t>Each block of 64 weights stores a scaling factor.</a:t>
             </a:r>
           </a:p>
           <a:p>
             <a:pPr>
               <a:spcAft>
-                <a:spcPts val="400"/>
+                <a:spcPts val="800"/>
               </a:spcAft>
               <a:defRPr>
                 <a:latin typeface="Calibri"/>
               </a:defRPr>
             </a:pPr>
             <a:r>
-              <a:rPr b="1" sz="1300">
+              <a:rPr b="1" sz="1500">
                 <a:solidFill>
                   <a:srgbClr val="0F172A"/>
                 </a:solidFill>
                 <a:latin typeface="Calibri"/>
               </a:rPr>
-              <a:t>• Second-Stage Compression: </a:t>
-            </a:r>
-            <a:r>
-              <a:rPr b="0" sz="1300">
+              <a:t>• FP32 → FP8 Scales: </a:t>
+            </a:r>
+            <a:r>
+              <a:rPr b="0" sz="1500">
                 <a:solidFill>
                   <a:srgbClr val="334155"/>
                 </a:solidFill>
                 <a:latin typeface="Calibri"/>
               </a:rPr>
-              <a:t>Double quantization (bnb_4bit_use_double_quant=True) quantizes the scaling constants themselves into 8-bit floats (FP8) in blocks of 256.</a:t>
+              <a:t>Quantizes the scaling factors themselves into 8-bit floats.</a:t>
             </a:r>
           </a:p>
           <a:p>
             <a:pPr>
               <a:spcAft>
-                <a:spcPts val="400"/>
+                <a:spcPts val="800"/>
               </a:spcAft>
               <a:defRPr>
                 <a:latin typeface="Calibri"/>
               </a:defRPr>
             </a:pPr>
             <a:r>
-              <a:rPr b="1" sz="1300">
+              <a:rPr b="1" sz="1500">
                 <a:solidFill>
                   <a:srgbClr val="0F172A"/>
                 </a:solidFill>
                 <a:latin typeface="Calibri"/>
               </a:rPr>
-              <a:t>• Memory Saved: </a:t>
-            </a:r>
-            <a:r>
-              <a:rPr b="0" sz="1300">
+              <a:t>• Extra VRAM Saved: </a:t>
+            </a:r>
+            <a:r>
+              <a:rPr b="0" sz="1500">
                 <a:solidFill>
                   <a:srgbClr val="334155"/>
                 </a:solidFill>
                 <a:latin typeface="Calibri"/>
               </a:rPr>
-              <a:t>Reduces scaling overhead from 0.5 bits/param down to 0.127 bits/param (~0.37 bits saved per weight across 2.6B params).</a:t>
+              <a:t>Cuts scale overhead from 0.5 to 0.13 bits per parameter.</a:t>
             </a:r>
           </a:p>
         </p:txBody>
@@ -7754,12 +7203,12 @@
         </p:nvSpPr>
         <p:spPr>
           <a:xfrm>
-            <a:off x="8046720" y="1280160"/>
-            <a:ext cx="3566160" cy="5120640"/>
+            <a:off x="8046720" y="1463040"/>
+            <a:ext cx="3474720" cy="4754880"/>
           </a:xfrm>
           <a:prstGeom prst="roundRect">
             <a:avLst>
-              <a:gd name="adj" fmla="val 2000"/>
+              <a:gd name="adj" fmla="val 2500"/>
             </a:avLst>
           </a:prstGeom>
           <a:solidFill>
@@ -7801,8 +7250,8 @@
         </p:nvSpPr>
         <p:spPr>
           <a:xfrm>
-            <a:off x="8046720" y="1353312"/>
-            <a:ext cx="73152" cy="4974336"/>
+            <a:off x="8046720" y="1554480"/>
+            <a:ext cx="82296" cy="4572000"/>
           </a:xfrm>
           <a:prstGeom prst="rect">
             <a:avLst/>
@@ -7844,8 +7293,8 @@
         </p:nvSpPr>
         <p:spPr>
           <a:xfrm>
-            <a:off x="8247888" y="1408176"/>
-            <a:ext cx="3246120" cy="4901183"/>
+            <a:off x="8302752" y="1645920"/>
+            <a:ext cx="3063239" cy="4434840"/>
           </a:xfrm>
           <a:prstGeom prst="rect">
             <a:avLst/>
@@ -7860,9 +7309,9 @@
           <a:p>
             <a:pPr>
               <a:spcAft>
-                <a:spcPts val="600"/>
+                <a:spcPts val="1000"/>
               </a:spcAft>
-              <a:defRPr sz="1600" b="1">
+              <a:defRPr sz="1900" b="1">
                 <a:solidFill>
                   <a:srgbClr val="0D9488"/>
                 </a:solidFill>
@@ -7870,91 +7319,91 @@
               </a:defRPr>
             </a:pPr>
             <a:r>
-              <a:t>3. Storage vs. Compute Dtype</a:t>
+              <a:t>3. Mixed-Precision Flow</a:t>
             </a:r>
           </a:p>
           <a:p>
             <a:pPr>
               <a:spcAft>
-                <a:spcPts val="400"/>
+                <a:spcPts val="800"/>
               </a:spcAft>
               <a:defRPr>
                 <a:latin typeface="Calibri"/>
               </a:defRPr>
             </a:pPr>
             <a:r>
-              <a:rPr b="1" sz="1300">
+              <a:rPr b="1" sz="1500">
                 <a:solidFill>
                   <a:srgbClr val="0F172A"/>
                 </a:solidFill>
                 <a:latin typeface="Calibri"/>
               </a:rPr>
-              <a:t>• Storage Dtype = 4-bit NF4: </a:t>
-            </a:r>
-            <a:r>
-              <a:rPr b="0" sz="1300">
+              <a:t>• 4-Bit Storage (1.4 GB): </a:t>
+            </a:r>
+            <a:r>
+              <a:rPr b="0" sz="1500">
                 <a:solidFill>
                   <a:srgbClr val="334155"/>
                 </a:solidFill>
                 <a:latin typeface="Calibri"/>
               </a:rPr>
-              <a:t>The 2.61B frozen base weights W_0 sit in GPU VRAM in 4-bit NF4 format (~1.4 GB instead of ~5.0 GB).</a:t>
+              <a:t>Frozen base weights W_0 stay compressed in GPU RAM.</a:t>
             </a:r>
           </a:p>
           <a:p>
             <a:pPr>
               <a:spcAft>
-                <a:spcPts val="400"/>
+                <a:spcPts val="800"/>
               </a:spcAft>
               <a:defRPr>
                 <a:latin typeface="Calibri"/>
               </a:defRPr>
             </a:pPr>
             <a:r>
-              <a:rPr b="1" sz="1300">
+              <a:rPr b="1" sz="1500">
                 <a:solidFill>
                   <a:srgbClr val="0F172A"/>
                 </a:solidFill>
                 <a:latin typeface="Calibri"/>
               </a:rPr>
-              <a:t>• Compute Dtype = 16-bit bf16: </a:t>
-            </a:r>
-            <a:r>
-              <a:rPr b="0" sz="1300">
+              <a:t>• 16-Bit Compute (bf16): </a:t>
+            </a:r>
+            <a:r>
+              <a:rPr b="0" sz="1500">
                 <a:solidFill>
                   <a:srgbClr val="334155"/>
                 </a:solidFill>
                 <a:latin typeface="Calibri"/>
               </a:rPr>
-              <a:t>During forward &amp; backward passes, W_0 blocks are dequantized on-the-fly to 16-bit bfloat16 for matrix multiplication.</a:t>
+              <a:t>W_0 is dequantized on-the-fly during matrix multiplication.</a:t>
             </a:r>
           </a:p>
           <a:p>
             <a:pPr>
               <a:spcAft>
-                <a:spcPts val="400"/>
+                <a:spcPts val="800"/>
               </a:spcAft>
               <a:defRPr>
                 <a:latin typeface="Calibri"/>
               </a:defRPr>
             </a:pPr>
             <a:r>
-              <a:rPr b="1" sz="1300">
+              <a:rPr b="1" sz="1500">
                 <a:solidFill>
                   <a:srgbClr val="0F172A"/>
                 </a:solidFill>
                 <a:latin typeface="Calibri"/>
               </a:rPr>
-              <a:t>• 16-bit LoRA Gradients: </a:t>
-            </a:r>
-            <a:r>
-              <a:rPr b="0" sz="1300">
+              <a:t>• 16-Bit LoRA Updates: </a:t>
+            </a:r>
+            <a:r>
+              <a:rPr b="0" sz="1500">
                 <a:solidFill>
                   <a:srgbClr val="334155"/>
                 </a:solidFill>
                 <a:latin typeface="Calibri"/>
               </a:rPr>
-              <a:t>LoRA adapters (A, B) are NEVER quantized—they stay in 16-bit bfloat16 so gradient updates lose zero precision.</a:t>
+              <a:t>Adapters A &amp; B are never quantized—zero gradient loss!</a:t>
             </a:r>
           </a:p>
         </p:txBody>
@@ -8028,8 +7477,8 @@
         </p:nvSpPr>
         <p:spPr>
           <a:xfrm>
-            <a:off x="548640" y="228600"/>
-            <a:ext cx="10241280" cy="777240"/>
+            <a:off x="640080" y="256032"/>
+            <a:ext cx="10058400" cy="868680"/>
           </a:xfrm>
           <a:prstGeom prst="rect">
             <a:avLst/>
@@ -8043,7 +7492,7 @@
           <a:lstStyle/>
           <a:p>
             <a:pPr>
-              <a:defRPr sz="2600" b="1">
+              <a:defRPr sz="2800" b="1">
                 <a:solidFill>
                   <a:srgbClr val="0F172A"/>
                 </a:solidFill>
@@ -8051,12 +7500,12 @@
               </a:defRPr>
             </a:pPr>
             <a:r>
-              <a:t>6. Head-to-Head: 16-bit bfloat16 LoRA vs. 4-bit NF4 QLoRA</a:t>
-            </a:r>
-          </a:p>
-          <a:p>
-            <a:pPr>
-              <a:defRPr sz="1350">
+              <a:t>6. Comparison: 16-bit LoRA vs. 4-bit QLoRA</a:t>
+            </a:r>
+          </a:p>
+          <a:p>
+            <a:pPr>
+              <a:defRPr sz="1500">
                 <a:solidFill>
                   <a:srgbClr val="64748B"/>
                 </a:solidFill>
@@ -8064,7 +7513,7 @@
               </a:defRPr>
             </a:pPr>
             <a:r>
-              <a:t>Architectural, hardware, and performance comparison on google/gemma-2-2b-it (GermEval 2017 Task C)</a:t>
+              <a:t>Hardware requirements and accuracy on Gemma-2-2B-IT (GermEval 2017 Task C)</a:t>
             </a:r>
           </a:p>
         </p:txBody>
@@ -8077,8 +7526,8 @@
         </p:nvSpPr>
         <p:spPr>
           <a:xfrm>
-            <a:off x="10789920" y="274320"/>
-            <a:ext cx="914400" cy="365760"/>
+            <a:off x="10698480" y="292608"/>
+            <a:ext cx="868680" cy="365760"/>
           </a:xfrm>
           <a:prstGeom prst="rect">
             <a:avLst/>
@@ -8092,7 +7541,7 @@
           <a:lstStyle/>
           <a:p>
             <a:pPr algn="r">
-              <a:defRPr sz="1200" b="1">
+              <a:defRPr sz="1300" b="1">
                 <a:solidFill>
                   <a:srgbClr val="64748B"/>
                 </a:solidFill>
@@ -8113,8 +7562,8 @@
         </p:nvSpPr>
         <p:spPr>
           <a:xfrm>
-            <a:off x="548640" y="1078992"/>
-            <a:ext cx="11094415" cy="18288"/>
+            <a:off x="640080" y="1170432"/>
+            <a:ext cx="10911535" cy="18288"/>
           </a:xfrm>
           <a:prstGeom prst="rect">
             <a:avLst/>
@@ -8157,8 +7606,8 @@
           <p:nvPr/>
         </p:nvGraphicFramePr>
         <p:xfrm>
-          <a:off x="548640" y="1325880"/>
-          <a:ext cx="11094415" cy="3931920"/>
+          <a:off x="640080" y="1463040"/>
+          <a:ext cx="10911535" cy="3474720"/>
         </p:xfrm>
         <a:graphic>
           <a:graphicData uri="http://schemas.openxmlformats.org/drawingml/2006/table">
@@ -8167,19 +7616,19 @@
                 <a:tableStyleId>{5C22544A-7EE6-4342-B048-85BDC9FD1C3A}</a:tableStyleId>
               </a:tblPr>
               <a:tblGrid>
-                <a:gridCol w="2864815"/>
-                <a:gridCol w="2560320"/>
-                <a:gridCol w="2834640"/>
-                <a:gridCol w="2834640"/>
+                <a:gridCol w="2956255"/>
+                <a:gridCol w="2468880"/>
+                <a:gridCol w="2743200"/>
+                <a:gridCol w="2743200"/>
               </a:tblGrid>
-              <a:tr h="491490">
+              <a:tr h="579120">
                 <a:tc>
                   <a:txBody>
                     <a:bodyPr/>
                     <a:lstStyle/>
                     <a:p>
                       <a:pPr>
-                        <a:defRPr b="1" sz="1250">
+                        <a:defRPr b="1" sz="1400">
                           <a:solidFill>
                             <a:srgbClr val="FFFFFF"/>
                           </a:solidFill>
@@ -8187,7 +7636,7 @@
                         </a:defRPr>
                       </a:pPr>
                       <a:r>
-                        <a:t>Dimension / Metric</a:t>
+                        <a:t>Feature</a:t>
                       </a:r>
                     </a:p>
                   </a:txBody>
@@ -8203,7 +7652,7 @@
                     <a:lstStyle/>
                     <a:p>
                       <a:pPr>
-                        <a:defRPr b="1" sz="1250">
+                        <a:defRPr b="1" sz="1400">
                           <a:solidFill>
                             <a:srgbClr val="FFFFFF"/>
                           </a:solidFill>
@@ -8211,7 +7660,7 @@
                         </a:defRPr>
                       </a:pPr>
                       <a:r>
-                        <a:t>Full Fine-Tuning (Reference)</a:t>
+                        <a:t>Full Fine-Tuning</a:t>
                       </a:r>
                     </a:p>
                   </a:txBody>
@@ -8227,7 +7676,7 @@
                     <a:lstStyle/>
                     <a:p>
                       <a:pPr>
-                        <a:defRPr b="1" sz="1250">
+                        <a:defRPr b="1" sz="1400">
                           <a:solidFill>
                             <a:srgbClr val="FFFFFF"/>
                           </a:solidFill>
@@ -8235,7 +7684,7 @@
                         </a:defRPr>
                       </a:pPr>
                       <a:r>
-                        <a:t>16-bit LoRA (configs/lora.yaml)</a:t>
+                        <a:t>16-bit LoRA (lora.yaml)</a:t>
                       </a:r>
                     </a:p>
                   </a:txBody>
@@ -8251,7 +7700,7 @@
                     <a:lstStyle/>
                     <a:p>
                       <a:pPr>
-                        <a:defRPr b="1" sz="1250">
+                        <a:defRPr b="1" sz="1400">
                           <a:solidFill>
                             <a:srgbClr val="FFFFFF"/>
                           </a:solidFill>
@@ -8259,7 +7708,7 @@
                         </a:defRPr>
                       </a:pPr>
                       <a:r>
-                        <a:t>4-bit QLoRA (configs/qlora.yaml)</a:t>
+                        <a:t>4-bit QLoRA (qlora.yaml)</a:t>
                       </a:r>
                     </a:p>
                   </a:txBody>
@@ -8270,14 +7719,14 @@
                   </a:tcPr>
                 </a:tc>
               </a:tr>
-              <a:tr h="491490">
+              <a:tr h="579120">
                 <a:tc>
                   <a:txBody>
                     <a:bodyPr/>
                     <a:lstStyle/>
                     <a:p>
                       <a:pPr>
-                        <a:defRPr sz="1150" b="1">
+                        <a:defRPr sz="1300" b="1">
                           <a:solidFill>
                             <a:srgbClr val="0F172A"/>
                           </a:solidFill>
@@ -8301,7 +7750,7 @@
                     <a:lstStyle/>
                     <a:p>
                       <a:pPr>
-                        <a:defRPr sz="1150" b="0">
+                        <a:defRPr sz="1300" b="0">
                           <a:solidFill>
                             <a:srgbClr val="334155"/>
                           </a:solidFill>
@@ -8309,7 +7758,7 @@
                         </a:defRPr>
                       </a:pPr>
                       <a:r>
-                        <a:t>None (All 2.61B updated)</a:t>
+                        <a:t>None (All updated)</a:t>
                       </a:r>
                     </a:p>
                   </a:txBody>
@@ -8325,7 +7774,7 @@
                     <a:lstStyle/>
                     <a:p>
                       <a:pPr>
-                        <a:defRPr sz="1150" b="0">
+                        <a:defRPr sz="1300" b="0">
                           <a:solidFill>
                             <a:srgbClr val="334155"/>
                           </a:solidFill>
@@ -8333,7 +7782,7 @@
                         </a:defRPr>
                       </a:pPr>
                       <a:r>
-                        <a:t>16-bit bfloat16 (~5.0 GB VRAM)</a:t>
+                        <a:t>16-bit bfloat16 (5.0 GB)</a:t>
                       </a:r>
                     </a:p>
                   </a:txBody>
@@ -8349,7 +7798,7 @@
                     <a:lstStyle/>
                     <a:p>
                       <a:pPr>
-                        <a:defRPr sz="1150" b="0">
+                        <a:defRPr sz="1300" b="0">
                           <a:solidFill>
                             <a:srgbClr val="334155"/>
                           </a:solidFill>
@@ -8357,7 +7806,7 @@
                         </a:defRPr>
                       </a:pPr>
                       <a:r>
-                        <a:t>4-bit NF4 + Double Quant (~1.4 GB)</a:t>
+                        <a:t>4-bit NF4 (1.4 GB, -72%)</a:t>
                       </a:r>
                     </a:p>
                   </a:txBody>
@@ -8368,14 +7817,14 @@
                   </a:tcPr>
                 </a:tc>
               </a:tr>
-              <a:tr h="491490">
+              <a:tr h="579120">
                 <a:tc>
                   <a:txBody>
                     <a:bodyPr/>
                     <a:lstStyle/>
                     <a:p>
                       <a:pPr>
-                        <a:defRPr sz="1150" b="1">
+                        <a:defRPr sz="1300" b="1">
                           <a:solidFill>
                             <a:srgbClr val="0F172A"/>
                           </a:solidFill>
@@ -8399,7 +7848,7 @@
                     <a:lstStyle/>
                     <a:p>
                       <a:pPr>
-                        <a:defRPr sz="1150" b="0">
+                        <a:defRPr sz="1300" b="0">
                           <a:solidFill>
                             <a:srgbClr val="334155"/>
                           </a:solidFill>
@@ -8407,7 +7856,7 @@
                         </a:defRPr>
                       </a:pPr>
                       <a:r>
-                        <a:t>2,614,341,888 (100%)</a:t>
+                        <a:t>2,614M (100%)</a:t>
                       </a:r>
                     </a:p>
                   </a:txBody>
@@ -8423,7 +7872,7 @@
                     <a:lstStyle/>
                     <a:p>
                       <a:pPr>
-                        <a:defRPr sz="1150" b="0">
+                        <a:defRPr sz="1300" b="0">
                           <a:solidFill>
                             <a:srgbClr val="334155"/>
                           </a:solidFill>
@@ -8431,7 +7880,7 @@
                         </a:defRPr>
                       </a:pPr>
                       <a:r>
-                        <a:t>20,766,720 (0.79%, r=16, α=32)</a:t>
+                        <a:t>20.8M (0.79%, r=16)</a:t>
                       </a:r>
                     </a:p>
                   </a:txBody>
@@ -8447,7 +7896,7 @@
                     <a:lstStyle/>
                     <a:p>
                       <a:pPr>
-                        <a:defRPr sz="1150" b="0">
+                        <a:defRPr sz="1300" b="0">
                           <a:solidFill>
                             <a:srgbClr val="334155"/>
                           </a:solidFill>
@@ -8455,7 +7904,7 @@
                         </a:defRPr>
                       </a:pPr>
                       <a:r>
-                        <a:t>20,766,720 (0.79%, r=16, α=32)</a:t>
+                        <a:t>20.8M (0.79%, r=16)</a:t>
                       </a:r>
                     </a:p>
                   </a:txBody>
@@ -8466,14 +7915,14 @@
                   </a:tcPr>
                 </a:tc>
               </a:tr>
-              <a:tr h="491490">
+              <a:tr h="579120">
                 <a:tc>
                   <a:txBody>
                     <a:bodyPr/>
                     <a:lstStyle/>
                     <a:p>
                       <a:pPr>
-                        <a:defRPr sz="1150" b="1">
+                        <a:defRPr sz="1300" b="1">
                           <a:solidFill>
                             <a:srgbClr val="0F172A"/>
                           </a:solidFill>
@@ -8481,7 +7930,7 @@
                         </a:defRPr>
                       </a:pPr>
                       <a:r>
-                        <a:t>Adapter &amp; Compute Dtype</a:t>
+                        <a:t>Peak Training VRAM</a:t>
                       </a:r>
                     </a:p>
                   </a:txBody>
@@ -8497,7 +7946,7 @@
                     <a:lstStyle/>
                     <a:p>
                       <a:pPr>
-                        <a:defRPr sz="1150" b="0">
+                        <a:defRPr sz="1300" b="1">
                           <a:solidFill>
                             <a:srgbClr val="334155"/>
                           </a:solidFill>
@@ -8505,7 +7954,7 @@
                         </a:defRPr>
                       </a:pPr>
                       <a:r>
-                        <a:t>16-bit bfloat16</a:t>
+                        <a:t>&gt; 32.0 GB</a:t>
                       </a:r>
                     </a:p>
                   </a:txBody>
@@ -8521,7 +7970,7 @@
                     <a:lstStyle/>
                     <a:p>
                       <a:pPr>
-                        <a:defRPr sz="1150" b="0">
+                        <a:defRPr sz="1300" b="1">
                           <a:solidFill>
                             <a:srgbClr val="334155"/>
                           </a:solidFill>
@@ -8529,7 +7978,7 @@
                         </a:defRPr>
                       </a:pPr>
                       <a:r>
-                        <a:t>16-bit bfloat16</a:t>
+                        <a:t>7.2 GB (Fits Colab L4/T4)</a:t>
                       </a:r>
                     </a:p>
                   </a:txBody>
@@ -8545,7 +7994,7 @@
                     <a:lstStyle/>
                     <a:p>
                       <a:pPr>
-                        <a:defRPr sz="1150" b="0">
+                        <a:defRPr sz="1300" b="1">
                           <a:solidFill>
                             <a:srgbClr val="334155"/>
                           </a:solidFill>
@@ -8553,7 +8002,7 @@
                         </a:defRPr>
                       </a:pPr>
                       <a:r>
-                        <a:t>16-bit bfloat16 (on-the-fly dequant)</a:t>
+                        <a:t>2.9 GB (Fits 8 GB GPU)</a:t>
                       </a:r>
                     </a:p>
                   </a:txBody>
@@ -8564,14 +8013,14 @@
                   </a:tcPr>
                 </a:tc>
               </a:tr>
-              <a:tr h="491490">
+              <a:tr h="579120">
                 <a:tc>
                   <a:txBody>
                     <a:bodyPr/>
                     <a:lstStyle/>
                     <a:p>
                       <a:pPr>
-                        <a:defRPr sz="1150" b="1">
+                        <a:defRPr sz="1300" b="1">
                           <a:solidFill>
                             <a:srgbClr val="0F172A"/>
                           </a:solidFill>
@@ -8579,7 +8028,7 @@
                         </a:defRPr>
                       </a:pPr>
                       <a:r>
-                        <a:t>Peak Training VRAM (Gemma-2-2B)</a:t>
+                        <a:t>Training Speed per Step</a:t>
                       </a:r>
                     </a:p>
                   </a:txBody>
@@ -8595,7 +8044,7 @@
                     <a:lstStyle/>
                     <a:p>
                       <a:pPr>
-                        <a:defRPr sz="1150" b="1">
+                        <a:defRPr sz="1300" b="0">
                           <a:solidFill>
                             <a:srgbClr val="334155"/>
                           </a:solidFill>
@@ -8603,7 +8052,7 @@
                         </a:defRPr>
                       </a:pPr>
                       <a:r>
-                        <a:t>&gt; 32.0 GB (OOM on L4/T4)</a:t>
+                        <a:t>Baseline</a:t>
                       </a:r>
                     </a:p>
                   </a:txBody>
@@ -8619,7 +8068,7 @@
                     <a:lstStyle/>
                     <a:p>
                       <a:pPr>
-                        <a:defRPr sz="1150" b="1">
+                        <a:defRPr sz="1300" b="0">
                           <a:solidFill>
                             <a:srgbClr val="334155"/>
                           </a:solidFill>
@@ -8627,7 +8076,7 @@
                         </a:defRPr>
                       </a:pPr>
                       <a:r>
-                        <a:t>7.2 GB (Fits L4 24GB &amp; T4 15GB)</a:t>
+                        <a:t>Fastest (No dequant)</a:t>
                       </a:r>
                     </a:p>
                   </a:txBody>
@@ -8643,7 +8092,7 @@
                     <a:lstStyle/>
                     <a:p>
                       <a:pPr>
-                        <a:defRPr sz="1150" b="1">
+                        <a:defRPr sz="1300" b="0">
                           <a:solidFill>
                             <a:srgbClr val="334155"/>
                           </a:solidFill>
@@ -8651,7 +8100,7 @@
                         </a:defRPr>
                       </a:pPr>
                       <a:r>
-                        <a:t>2.9 GB (Fits even 8GB consumer GPU)</a:t>
+                        <a:t>~15% slower (NF4 dequant)</a:t>
                       </a:r>
                     </a:p>
                   </a:txBody>
@@ -8662,14 +8111,14 @@
                   </a:tcPr>
                 </a:tc>
               </a:tr>
-              <a:tr h="491490">
+              <a:tr h="579120">
                 <a:tc>
                   <a:txBody>
                     <a:bodyPr/>
                     <a:lstStyle/>
                     <a:p>
                       <a:pPr>
-                        <a:defRPr sz="1150" b="1">
+                        <a:defRPr sz="1300" b="1">
                           <a:solidFill>
                             <a:srgbClr val="0F172A"/>
                           </a:solidFill>
@@ -8677,7 +8126,7 @@
                         </a:defRPr>
                       </a:pPr>
                       <a:r>
-                        <a:t>Step Latency Overhead</a:t>
+                        <a:t>Task C2 Micro-F1 (test_syn)</a:t>
                       </a:r>
                     </a:p>
                   </a:txBody>
@@ -8693,203 +8142,7 @@
                     <a:lstStyle/>
                     <a:p>
                       <a:pPr>
-                        <a:defRPr sz="1150" b="0">
-                          <a:solidFill>
-                            <a:srgbClr val="334155"/>
-                          </a:solidFill>
-                          <a:latin typeface="Calibri"/>
-                        </a:defRPr>
-                      </a:pPr>
-                      <a:r>
-                        <a:t>Baseline (1.0x)</a:t>
-                      </a:r>
-                    </a:p>
-                  </a:txBody>
-                  <a:tcPr anchor="ctr">
-                    <a:solidFill>
-                      <a:srgbClr val="FFFFFF"/>
-                    </a:solidFill>
-                  </a:tcPr>
-                </a:tc>
-                <a:tc>
-                  <a:txBody>
-                    <a:bodyPr/>
-                    <a:lstStyle/>
-                    <a:p>
-                      <a:pPr>
-                        <a:defRPr sz="1150" b="0">
-                          <a:solidFill>
-                            <a:srgbClr val="334155"/>
-                          </a:solidFill>
-                          <a:latin typeface="Calibri"/>
-                        </a:defRPr>
-                      </a:pPr>
-                      <a:r>
-                        <a:t>Fastest PEFT (No dequantization)</a:t>
-                      </a:r>
-                    </a:p>
-                  </a:txBody>
-                  <a:tcPr anchor="ctr">
-                    <a:solidFill>
-                      <a:srgbClr val="FFFFFF"/>
-                    </a:solidFill>
-                  </a:tcPr>
-                </a:tc>
-                <a:tc>
-                  <a:txBody>
-                    <a:bodyPr/>
-                    <a:lstStyle/>
-                    <a:p>
-                      <a:pPr>
-                        <a:defRPr sz="1150" b="0">
-                          <a:solidFill>
-                            <a:srgbClr val="334155"/>
-                          </a:solidFill>
-                          <a:latin typeface="Calibri"/>
-                        </a:defRPr>
-                      </a:pPr>
-                      <a:r>
-                        <a:t>~15–20% slower (NF4 dequant kernel)</a:t>
-                      </a:r>
-                    </a:p>
-                  </a:txBody>
-                  <a:tcPr anchor="ctr">
-                    <a:solidFill>
-                      <a:srgbClr val="FFFFFF"/>
-                    </a:solidFill>
-                  </a:tcPr>
-                </a:tc>
-              </a:tr>
-              <a:tr h="491490">
-                <a:tc>
-                  <a:txBody>
-                    <a:bodyPr/>
-                    <a:lstStyle/>
-                    <a:p>
-                      <a:pPr>
-                        <a:defRPr sz="1150" b="1">
-                          <a:solidFill>
-                            <a:srgbClr val="0F172A"/>
-                          </a:solidFill>
-                          <a:latin typeface="Calibri"/>
-                        </a:defRPr>
-                      </a:pPr>
-                      <a:r>
-                        <a:t>Task C2 Strict Micro-F1 (test_syn)</a:t>
-                      </a:r>
-                    </a:p>
-                  </a:txBody>
-                  <a:tcPr anchor="ctr">
-                    <a:solidFill>
-                      <a:srgbClr val="F8FAFC"/>
-                    </a:solidFill>
-                  </a:tcPr>
-                </a:tc>
-                <a:tc>
-                  <a:txBody>
-                    <a:bodyPr/>
-                    <a:lstStyle/>
-                    <a:p>
-                      <a:pPr>
-                        <a:defRPr sz="1150" b="1">
-                          <a:solidFill>
-                            <a:srgbClr val="334155"/>
-                          </a:solidFill>
-                          <a:latin typeface="Calibri"/>
-                        </a:defRPr>
-                      </a:pPr>
-                      <a:r>
-                        <a:t>N/A</a:t>
-                      </a:r>
-                    </a:p>
-                  </a:txBody>
-                  <a:tcPr anchor="ctr">
-                    <a:solidFill>
-                      <a:srgbClr val="F8FAFC"/>
-                    </a:solidFill>
-                  </a:tcPr>
-                </a:tc>
-                <a:tc>
-                  <a:txBody>
-                    <a:bodyPr/>
-                    <a:lstStyle/>
-                    <a:p>
-                      <a:pPr>
-                        <a:defRPr sz="1150" b="1">
-                          <a:solidFill>
-                            <a:srgbClr val="334155"/>
-                          </a:solidFill>
-                          <a:latin typeface="Calibri"/>
-                        </a:defRPr>
-                      </a:pPr>
-                      <a:r>
-                        <a:t>0.7204 (95% CI: [0.706, 0.735])</a:t>
-                      </a:r>
-                    </a:p>
-                  </a:txBody>
-                  <a:tcPr anchor="ctr">
-                    <a:solidFill>
-                      <a:srgbClr val="EFF6FF"/>
-                    </a:solidFill>
-                  </a:tcPr>
-                </a:tc>
-                <a:tc>
-                  <a:txBody>
-                    <a:bodyPr/>
-                    <a:lstStyle/>
-                    <a:p>
-                      <a:pPr>
-                        <a:defRPr sz="1150" b="1">
-                          <a:solidFill>
-                            <a:srgbClr val="334155"/>
-                          </a:solidFill>
-                          <a:latin typeface="Calibri"/>
-                        </a:defRPr>
-                      </a:pPr>
-                      <a:r>
-                        <a:t>0.7191 (Δ = -0.0013, indistinguishable)</a:t>
-                      </a:r>
-                    </a:p>
-                  </a:txBody>
-                  <a:tcPr anchor="ctr">
-                    <a:solidFill>
-                      <a:srgbClr val="F0FDFA"/>
-                    </a:solidFill>
-                  </a:tcPr>
-                </a:tc>
-              </a:tr>
-              <a:tr h="491490">
-                <a:tc>
-                  <a:txBody>
-                    <a:bodyPr/>
-                    <a:lstStyle/>
-                    <a:p>
-                      <a:pPr>
-                        <a:defRPr sz="1150" b="1">
-                          <a:solidFill>
-                            <a:srgbClr val="0F172A"/>
-                          </a:solidFill>
-                          <a:latin typeface="Calibri"/>
-                        </a:defRPr>
-                      </a:pPr>
-                      <a:r>
-                        <a:t>JSON Schema Validity (test_syn)</a:t>
-                      </a:r>
-                    </a:p>
-                  </a:txBody>
-                  <a:tcPr anchor="ctr">
-                    <a:solidFill>
-                      <a:srgbClr val="FFFFFF"/>
-                    </a:solidFill>
-                  </a:tcPr>
-                </a:tc>
-                <a:tc>
-                  <a:txBody>
-                    <a:bodyPr/>
-                    <a:lstStyle/>
-                    <a:p>
-                      <a:pPr>
-                        <a:defRPr sz="1150" b="0">
+                        <a:defRPr sz="1300" b="1">
                           <a:solidFill>
                             <a:srgbClr val="334155"/>
                           </a:solidFill>
@@ -8913,7 +8166,7 @@
                     <a:lstStyle/>
                     <a:p>
                       <a:pPr>
-                        <a:defRPr sz="1150" b="0">
+                        <a:defRPr sz="1300" b="1">
                           <a:solidFill>
                             <a:srgbClr val="334155"/>
                           </a:solidFill>
@@ -8921,7 +8174,7 @@
                         </a:defRPr>
                       </a:pPr>
                       <a:r>
-                        <a:t>100.0% VALID_EXACT</a:t>
+                        <a:t>0.7204 (100% Valid JSON)</a:t>
                       </a:r>
                     </a:p>
                   </a:txBody>
@@ -8937,7 +8190,7 @@
                     <a:lstStyle/>
                     <a:p>
                       <a:pPr>
-                        <a:defRPr sz="1150" b="0">
+                        <a:defRPr sz="1300" b="1">
                           <a:solidFill>
                             <a:srgbClr val="334155"/>
                           </a:solidFill>
@@ -8945,7 +8198,7 @@
                         </a:defRPr>
                       </a:pPr>
                       <a:r>
-                        <a:t>100.0% VALID_EXACT</a:t>
+                        <a:t>0.7191 (100% Valid JSON)</a:t>
                       </a:r>
                     </a:p>
                   </a:txBody>
@@ -8968,12 +8221,12 @@
         </p:nvSpPr>
         <p:spPr>
           <a:xfrm>
-            <a:off x="548640" y="5440680"/>
-            <a:ext cx="11094415" cy="1005840"/>
+            <a:off x="640080" y="5166360"/>
+            <a:ext cx="10911535" cy="1097280"/>
           </a:xfrm>
           <a:prstGeom prst="roundRect">
             <a:avLst>
-              <a:gd name="adj" fmla="val 2000"/>
+              <a:gd name="adj" fmla="val 2500"/>
             </a:avLst>
           </a:prstGeom>
           <a:solidFill>
@@ -9015,8 +8268,8 @@
         </p:nvSpPr>
         <p:spPr>
           <a:xfrm>
-            <a:off x="548640" y="5513832"/>
-            <a:ext cx="73152" cy="859536"/>
+            <a:off x="640080" y="5257800"/>
+            <a:ext cx="82296" cy="914400"/>
           </a:xfrm>
           <a:prstGeom prst="rect">
             <a:avLst/>
@@ -9058,8 +8311,8 @@
         </p:nvSpPr>
         <p:spPr>
           <a:xfrm>
-            <a:off x="749808" y="5568696"/>
-            <a:ext cx="10774375" cy="786384"/>
+            <a:off x="896112" y="5349240"/>
+            <a:ext cx="10500055" cy="777240"/>
           </a:xfrm>
           <a:prstGeom prst="rect">
             <a:avLst/>
@@ -9074,9 +8327,9 @@
           <a:p>
             <a:pPr>
               <a:spcAft>
-                <a:spcPts val="600"/>
+                <a:spcPts val="1000"/>
               </a:spcAft>
-              <a:defRPr sz="1400" b="1">
+              <a:defRPr sz="1500" b="1">
                 <a:solidFill>
                   <a:srgbClr val="D97706"/>
                 </a:solidFill>
@@ -9084,35 +8337,35 @@
               </a:defRPr>
             </a:pPr>
             <a:r>
-              <a:t>Practical Takeaway for Google Colab (Notebook 11)</a:t>
+              <a:t>One-Line Toggle in Colab Demo (Notebook 11, Step 3)</a:t>
             </a:r>
           </a:p>
           <a:p>
             <a:pPr>
               <a:spcAft>
-                <a:spcPts val="400"/>
+                <a:spcPts val="800"/>
               </a:spcAft>
               <a:defRPr>
                 <a:latin typeface="Calibri"/>
               </a:defRPr>
             </a:pPr>
             <a:r>
-              <a:rPr b="1" sz="1200">
+              <a:rPr b="1" sz="1350">
                 <a:solidFill>
                   <a:srgbClr val="0F172A"/>
                 </a:solidFill>
                 <a:latin typeface="Calibri"/>
               </a:rPr>
-              <a:t>• Single-Flag Toggle in Step 3: </a:t>
-            </a:r>
-            <a:r>
-              <a:rPr b="0" sz="1200">
+              <a:t>• USE_4BIT_QUANTIZATION = True / False: </a:t>
+            </a:r>
+            <a:r>
+              <a:rPr b="0" sz="1350">
                 <a:solidFill>
                   <a:srgbClr val="334155"/>
                 </a:solidFill>
                 <a:latin typeface="Calibri"/>
               </a:rPr>
-              <a:t>Set USE_4BIT_QUANTIZATION = True (default) for 4-bit NF4 QLoRA (~2.9 GB VRAM), or USE_4BIT_QUANTIZATION = False for 16-bit bfloat16 LoRA (~7.2 GB VRAM). Both achieve ~0.720 Micro-F1 on GermEval 2017 Task C2!</a:t>
+              <a:t>Switch seamlessly between 4-bit QLoRA (2.9 GB VRAM) and 16-bit LoRA (7.2 GB VRAM) with identical ~0.720 F1.</a:t>
             </a:r>
           </a:p>
         </p:txBody>
@@ -9186,8 +8439,8 @@
         </p:nvSpPr>
         <p:spPr>
           <a:xfrm>
-            <a:off x="548640" y="228600"/>
-            <a:ext cx="10241280" cy="777240"/>
+            <a:off x="640080" y="256032"/>
+            <a:ext cx="10058400" cy="868680"/>
           </a:xfrm>
           <a:prstGeom prst="rect">
             <a:avLst/>
@@ -9201,7 +8454,7 @@
           <a:lstStyle/>
           <a:p>
             <a:pPr>
-              <a:defRPr sz="2600" b="1">
+              <a:defRPr sz="2800" b="1">
                 <a:solidFill>
                   <a:srgbClr val="0F172A"/>
                 </a:solidFill>
@@ -9209,12 +8462,12 @@
               </a:defRPr>
             </a:pPr>
             <a:r>
-              <a:t>7. Empirical Results &amp; Key Takeaways on GermEval 2017</a:t>
-            </a:r>
-          </a:p>
-          <a:p>
-            <a:pPr>
-              <a:defRPr sz="1350">
+              <a:t>7. Empirical Results &amp; Key Takeaways</a:t>
+            </a:r>
+          </a:p>
+          <a:p>
+            <a:pPr>
+              <a:defRPr sz="1500">
                 <a:solidFill>
                   <a:srgbClr val="64748B"/>
                 </a:solidFill>
@@ -9222,7 +8475,7 @@
               </a:defRPr>
             </a:pPr>
             <a:r>
-              <a:t>Summary across Prompting Baselines, 16-bit LoRA, and 4-bit QLoRA on Synchronic (test_syn) &amp; Diachronic (test_dia) Splits</a:t>
+              <a:t>Benchmark results on GermEval 2017 (test_syn) and data efficiency</a:t>
             </a:r>
           </a:p>
         </p:txBody>
@@ -9235,8 +8488,8 @@
         </p:nvSpPr>
         <p:spPr>
           <a:xfrm>
-            <a:off x="10789920" y="274320"/>
-            <a:ext cx="914400" cy="365760"/>
+            <a:off x="10698480" y="292608"/>
+            <a:ext cx="868680" cy="365760"/>
           </a:xfrm>
           <a:prstGeom prst="rect">
             <a:avLst/>
@@ -9250,7 +8503,7 @@
           <a:lstStyle/>
           <a:p>
             <a:pPr algn="r">
-              <a:defRPr sz="1200" b="1">
+              <a:defRPr sz="1300" b="1">
                 <a:solidFill>
                   <a:srgbClr val="64748B"/>
                 </a:solidFill>
@@ -9271,8 +8524,8 @@
         </p:nvSpPr>
         <p:spPr>
           <a:xfrm>
-            <a:off x="548640" y="1078992"/>
-            <a:ext cx="11094415" cy="18288"/>
+            <a:off x="640080" y="1170432"/>
+            <a:ext cx="10911535" cy="18288"/>
           </a:xfrm>
           <a:prstGeom prst="rect">
             <a:avLst/>
@@ -9315,8 +8568,8 @@
           <p:nvPr/>
         </p:nvGraphicFramePr>
         <p:xfrm>
-          <a:off x="548640" y="1325880"/>
-          <a:ext cx="6675120" cy="3474720"/>
+          <a:off x="640080" y="1463040"/>
+          <a:ext cx="6217920" cy="3291840"/>
         </p:xfrm>
         <a:graphic>
           <a:graphicData uri="http://schemas.openxmlformats.org/drawingml/2006/table">
@@ -9325,20 +8578,19 @@
                 <a:tableStyleId>{5C22544A-7EE6-4342-B048-85BDC9FD1C3A}</a:tableStyleId>
               </a:tblPr>
               <a:tblGrid>
-                <a:gridCol w="2286000"/>
-                <a:gridCol w="1097280"/>
-                <a:gridCol w="1097280"/>
-                <a:gridCol w="1097280"/>
-                <a:gridCol w="1097280"/>
+                <a:gridCol w="2651760"/>
+                <a:gridCol w="1188720"/>
+                <a:gridCol w="1188720"/>
+                <a:gridCol w="1188720"/>
               </a:tblGrid>
-              <a:tr h="496388">
+              <a:tr h="548640">
                 <a:tc>
                   <a:txBody>
                     <a:bodyPr/>
                     <a:lstStyle/>
                     <a:p>
                       <a:pPr>
-                        <a:defRPr b="1" sz="1150">
+                        <a:defRPr b="1" sz="1300">
                           <a:solidFill>
                             <a:srgbClr val="FFFFFF"/>
                           </a:solidFill>
@@ -9346,7 +8598,7 @@
                         </a:defRPr>
                       </a:pPr>
                       <a:r>
-                        <a:t>Method / Run ID</a:t>
+                        <a:t>Method</a:t>
                       </a:r>
                     </a:p>
                   </a:txBody>
@@ -9362,7 +8614,7 @@
                     <a:lstStyle/>
                     <a:p>
                       <a:pPr>
-                        <a:defRPr b="1" sz="1150">
+                        <a:defRPr b="1" sz="1300">
                           <a:solidFill>
                             <a:srgbClr val="FFFFFF"/>
                           </a:solidFill>
@@ -9386,7 +8638,7 @@
                     <a:lstStyle/>
                     <a:p>
                       <a:pPr>
-                        <a:defRPr b="1" sz="1150">
+                        <a:defRPr b="1" sz="1300">
                           <a:solidFill>
                             <a:srgbClr val="FFFFFF"/>
                           </a:solidFill>
@@ -9410,7 +8662,7 @@
                     <a:lstStyle/>
                     <a:p>
                       <a:pPr>
-                        <a:defRPr b="1" sz="1150">
+                        <a:defRPr b="1" sz="1300">
                           <a:solidFill>
                             <a:srgbClr val="FFFFFF"/>
                           </a:solidFill>
@@ -9428,39 +8680,15 @@
                     </a:solidFill>
                   </a:tcPr>
                 </a:tc>
+              </a:tr>
+              <a:tr h="548640">
                 <a:tc>
                   <a:txBody>
                     <a:bodyPr/>
                     <a:lstStyle/>
                     <a:p>
                       <a:pPr>
-                        <a:defRPr b="1" sz="1150">
-                          <a:solidFill>
-                            <a:srgbClr val="FFFFFF"/>
-                          </a:solidFill>
-                          <a:latin typeface="Calibri"/>
-                        </a:defRPr>
-                      </a:pPr>
-                      <a:r>
-                        <a:t>Dia C2 F1</a:t>
-                      </a:r>
-                    </a:p>
-                  </a:txBody>
-                  <a:tcPr anchor="ctr">
-                    <a:solidFill>
-                      <a:srgbClr val="0F172A"/>
-                    </a:solidFill>
-                  </a:tcPr>
-                </a:tc>
-              </a:tr>
-              <a:tr h="496388">
-                <a:tc>
-                  <a:txBody>
-                    <a:bodyPr/>
-                    <a:lstStyle/>
-                    <a:p>
-                      <a:pPr>
-                        <a:defRPr sz="1150" b="1">
+                        <a:defRPr sz="1300" b="1">
                           <a:solidFill>
                             <a:srgbClr val="0F172A"/>
                           </a:solidFill>
@@ -9484,7 +8712,7 @@
                     <a:lstStyle/>
                     <a:p>
                       <a:pPr>
-                        <a:defRPr sz="1150" b="0">
+                        <a:defRPr sz="1300" b="0">
                           <a:solidFill>
                             <a:srgbClr val="0F172A"/>
                           </a:solidFill>
@@ -9508,7 +8736,7 @@
                     <a:lstStyle/>
                     <a:p>
                       <a:pPr>
-                        <a:defRPr sz="1150" b="0">
+                        <a:defRPr sz="1300" b="0">
                           <a:solidFill>
                             <a:srgbClr val="0F172A"/>
                           </a:solidFill>
@@ -9532,7 +8760,7 @@
                     <a:lstStyle/>
                     <a:p>
                       <a:pPr>
-                        <a:defRPr sz="1150" b="0">
+                        <a:defRPr sz="1300" b="0">
                           <a:solidFill>
                             <a:srgbClr val="0F172A"/>
                           </a:solidFill>
@@ -9550,39 +8778,15 @@
                     </a:solidFill>
                   </a:tcPr>
                 </a:tc>
+              </a:tr>
+              <a:tr h="548640">
                 <a:tc>
                   <a:txBody>
                     <a:bodyPr/>
                     <a:lstStyle/>
                     <a:p>
                       <a:pPr>
-                        <a:defRPr sz="1150" b="0">
-                          <a:solidFill>
-                            <a:srgbClr val="0F172A"/>
-                          </a:solidFill>
-                          <a:latin typeface="Calibri"/>
-                        </a:defRPr>
-                      </a:pPr>
-                      <a:r>
-                        <a:t>0.201</a:t>
-                      </a:r>
-                    </a:p>
-                  </a:txBody>
-                  <a:tcPr anchor="ctr">
-                    <a:solidFill>
-                      <a:srgbClr val="FFFFFF"/>
-                    </a:solidFill>
-                  </a:tcPr>
-                </a:tc>
-              </a:tr>
-              <a:tr h="496388">
-                <a:tc>
-                  <a:txBody>
-                    <a:bodyPr/>
-                    <a:lstStyle/>
-                    <a:p>
-                      <a:pPr>
-                        <a:defRPr sz="1150" b="1">
+                        <a:defRPr sz="1300" b="1">
                           <a:solidFill>
                             <a:srgbClr val="0F172A"/>
                           </a:solidFill>
@@ -9606,7 +8810,7 @@
                     <a:lstStyle/>
                     <a:p>
                       <a:pPr>
-                        <a:defRPr sz="1150" b="0">
+                        <a:defRPr sz="1300" b="0">
                           <a:solidFill>
                             <a:srgbClr val="0F172A"/>
                           </a:solidFill>
@@ -9630,7 +8834,7 @@
                     <a:lstStyle/>
                     <a:p>
                       <a:pPr>
-                        <a:defRPr sz="1150" b="0">
+                        <a:defRPr sz="1300" b="0">
                           <a:solidFill>
                             <a:srgbClr val="0F172A"/>
                           </a:solidFill>
@@ -9654,7 +8858,7 @@
                     <a:lstStyle/>
                     <a:p>
                       <a:pPr>
-                        <a:defRPr sz="1150" b="0">
+                        <a:defRPr sz="1300" b="0">
                           <a:solidFill>
                             <a:srgbClr val="0F172A"/>
                           </a:solidFill>
@@ -9672,13 +8876,15 @@
                     </a:solidFill>
                   </a:tcPr>
                 </a:tc>
+              </a:tr>
+              <a:tr h="548640">
                 <a:tc>
                   <a:txBody>
                     <a:bodyPr/>
                     <a:lstStyle/>
                     <a:p>
                       <a:pPr>
-                        <a:defRPr sz="1150" b="0">
+                        <a:defRPr sz="1300" b="1">
                           <a:solidFill>
                             <a:srgbClr val="0F172A"/>
                           </a:solidFill>
@@ -9686,33 +8892,7 @@
                         </a:defRPr>
                       </a:pPr>
                       <a:r>
-                        <a:t>0.244</a:t>
-                      </a:r>
-                    </a:p>
-                  </a:txBody>
-                  <a:tcPr anchor="ctr">
-                    <a:solidFill>
-                      <a:srgbClr val="F8FAFC"/>
-                    </a:solidFill>
-                  </a:tcPr>
-                </a:tc>
-              </a:tr>
-              <a:tr h="496388">
-                <a:tc>
-                  <a:txBody>
-                    <a:bodyPr/>
-                    <a:lstStyle/>
-                    <a:p>
-                      <a:pPr>
-                        <a:defRPr sz="1150" b="1">
-                          <a:solidFill>
-                            <a:srgbClr val="0F172A"/>
-                          </a:solidFill>
-                          <a:latin typeface="Calibri"/>
-                        </a:defRPr>
-                      </a:pPr>
-                      <a:r>
-                        <a:t>P2 Few-Shot (2-Shot)</a:t>
+                        <a:t>P3 Optimized 10-Shot</a:t>
                       </a:r>
                     </a:p>
                   </a:txBody>
@@ -9728,7 +8908,7 @@
                     <a:lstStyle/>
                     <a:p>
                       <a:pPr>
-                        <a:defRPr sz="1150" b="0">
+                        <a:defRPr sz="1300" b="0">
                           <a:solidFill>
                             <a:srgbClr val="0F172A"/>
                           </a:solidFill>
@@ -9736,7 +8916,7 @@
                         </a:defRPr>
                       </a:pPr>
                       <a:r>
-                        <a:t>98.1%</a:t>
+                        <a:t>99.4%</a:t>
                       </a:r>
                     </a:p>
                   </a:txBody>
@@ -9752,7 +8932,7 @@
                     <a:lstStyle/>
                     <a:p>
                       <a:pPr>
-                        <a:defRPr sz="1150" b="0">
+                        <a:defRPr sz="1300" b="0">
                           <a:solidFill>
                             <a:srgbClr val="0F172A"/>
                           </a:solidFill>
@@ -9760,7 +8940,7 @@
                         </a:defRPr>
                       </a:pPr>
                       <a:r>
-                        <a:t>0.491</a:t>
+                        <a:t>0.569</a:t>
                       </a:r>
                     </a:p>
                   </a:txBody>
@@ -9776,129 +8956,7 @@
                     <a:lstStyle/>
                     <a:p>
                       <a:pPr>
-                        <a:defRPr sz="1150" b="0">
-                          <a:solidFill>
-                            <a:srgbClr val="0F172A"/>
-                          </a:solidFill>
-                          <a:latin typeface="Calibri"/>
-                        </a:defRPr>
-                      </a:pPr>
-                      <a:r>
-                        <a:t>0.371</a:t>
-                      </a:r>
-                    </a:p>
-                  </a:txBody>
-                  <a:tcPr anchor="ctr">
-                    <a:solidFill>
-                      <a:srgbClr val="FFFFFF"/>
-                    </a:solidFill>
-                  </a:tcPr>
-                </a:tc>
-                <a:tc>
-                  <a:txBody>
-                    <a:bodyPr/>
-                    <a:lstStyle/>
-                    <a:p>
-                      <a:pPr>
-                        <a:defRPr sz="1150" b="0">
-                          <a:solidFill>
-                            <a:srgbClr val="0F172A"/>
-                          </a:solidFill>
-                          <a:latin typeface="Calibri"/>
-                        </a:defRPr>
-                      </a:pPr>
-                      <a:r>
-                        <a:t>0.355</a:t>
-                      </a:r>
-                    </a:p>
-                  </a:txBody>
-                  <a:tcPr anchor="ctr">
-                    <a:solidFill>
-                      <a:srgbClr val="FFFFFF"/>
-                    </a:solidFill>
-                  </a:tcPr>
-                </a:tc>
-              </a:tr>
-              <a:tr h="496388">
-                <a:tc>
-                  <a:txBody>
-                    <a:bodyPr/>
-                    <a:lstStyle/>
-                    <a:p>
-                      <a:pPr>
-                        <a:defRPr sz="1150" b="1">
-                          <a:solidFill>
-                            <a:srgbClr val="0F172A"/>
-                          </a:solidFill>
-                          <a:latin typeface="Calibri"/>
-                        </a:defRPr>
-                      </a:pPr>
-                      <a:r>
-                        <a:t>P3 Optimized 10-Shot</a:t>
-                      </a:r>
-                    </a:p>
-                  </a:txBody>
-                  <a:tcPr anchor="ctr">
-                    <a:solidFill>
-                      <a:srgbClr val="F8FAFC"/>
-                    </a:solidFill>
-                  </a:tcPr>
-                </a:tc>
-                <a:tc>
-                  <a:txBody>
-                    <a:bodyPr/>
-                    <a:lstStyle/>
-                    <a:p>
-                      <a:pPr>
-                        <a:defRPr sz="1150" b="0">
-                          <a:solidFill>
-                            <a:srgbClr val="0F172A"/>
-                          </a:solidFill>
-                          <a:latin typeface="Calibri"/>
-                        </a:defRPr>
-                      </a:pPr>
-                      <a:r>
-                        <a:t>99.4%</a:t>
-                      </a:r>
-                    </a:p>
-                  </a:txBody>
-                  <a:tcPr anchor="ctr">
-                    <a:solidFill>
-                      <a:srgbClr val="F8FAFC"/>
-                    </a:solidFill>
-                  </a:tcPr>
-                </a:tc>
-                <a:tc>
-                  <a:txBody>
-                    <a:bodyPr/>
-                    <a:lstStyle/>
-                    <a:p>
-                      <a:pPr>
-                        <a:defRPr sz="1150" b="0">
-                          <a:solidFill>
-                            <a:srgbClr val="0F172A"/>
-                          </a:solidFill>
-                          <a:latin typeface="Calibri"/>
-                        </a:defRPr>
-                      </a:pPr>
-                      <a:r>
-                        <a:t>0.569</a:t>
-                      </a:r>
-                    </a:p>
-                  </a:txBody>
-                  <a:tcPr anchor="ctr">
-                    <a:solidFill>
-                      <a:srgbClr val="F8FAFC"/>
-                    </a:solidFill>
-                  </a:tcPr>
-                </a:tc>
-                <a:tc>
-                  <a:txBody>
-                    <a:bodyPr/>
-                    <a:lstStyle/>
-                    <a:p>
-                      <a:pPr>
-                        <a:defRPr sz="1150" b="0">
+                        <a:defRPr sz="1300" b="0">
                           <a:solidFill>
                             <a:srgbClr val="0F172A"/>
                           </a:solidFill>
@@ -9912,43 +8970,19 @@
                   </a:txBody>
                   <a:tcPr anchor="ctr">
                     <a:solidFill>
-                      <a:srgbClr val="F8FAFC"/>
+                      <a:srgbClr val="FFFFFF"/>
                     </a:solidFill>
                   </a:tcPr>
                 </a:tc>
+              </a:tr>
+              <a:tr h="548640">
                 <a:tc>
                   <a:txBody>
                     <a:bodyPr/>
                     <a:lstStyle/>
                     <a:p>
                       <a:pPr>
-                        <a:defRPr sz="1150" b="0">
-                          <a:solidFill>
-                            <a:srgbClr val="0F172A"/>
-                          </a:solidFill>
-                          <a:latin typeface="Calibri"/>
-                        </a:defRPr>
-                      </a:pPr>
-                      <a:r>
-                        <a:t>0.438</a:t>
-                      </a:r>
-                    </a:p>
-                  </a:txBody>
-                  <a:tcPr anchor="ctr">
-                    <a:solidFill>
-                      <a:srgbClr val="F8FAFC"/>
-                    </a:solidFill>
-                  </a:tcPr>
-                </a:tc>
-              </a:tr>
-              <a:tr h="496388">
-                <a:tc>
-                  <a:txBody>
-                    <a:bodyPr/>
-                    <a:lstStyle/>
-                    <a:p>
-                      <a:pPr>
-                        <a:defRPr sz="1150" b="1">
+                        <a:defRPr sz="1300" b="1">
                           <a:solidFill>
                             <a:srgbClr val="0F172A"/>
                           </a:solidFill>
@@ -9972,7 +9006,7 @@
                     <a:lstStyle/>
                     <a:p>
                       <a:pPr>
-                        <a:defRPr sz="1150" b="1">
+                        <a:defRPr sz="1300" b="1">
                           <a:solidFill>
                             <a:srgbClr val="0F172A"/>
                           </a:solidFill>
@@ -9996,7 +9030,7 @@
                     <a:lstStyle/>
                     <a:p>
                       <a:pPr>
-                        <a:defRPr sz="1150" b="1">
+                        <a:defRPr sz="1300" b="1">
                           <a:solidFill>
                             <a:srgbClr val="0D9488"/>
                           </a:solidFill>
@@ -10020,7 +9054,7 @@
                     <a:lstStyle/>
                     <a:p>
                       <a:pPr>
-                        <a:defRPr sz="1150" b="1">
+                        <a:defRPr sz="1300" b="1">
                           <a:solidFill>
                             <a:srgbClr val="0D9488"/>
                           </a:solidFill>
@@ -10038,39 +9072,15 @@
                     </a:solidFill>
                   </a:tcPr>
                 </a:tc>
+              </a:tr>
+              <a:tr h="548640">
                 <a:tc>
                   <a:txBody>
                     <a:bodyPr/>
                     <a:lstStyle/>
                     <a:p>
                       <a:pPr>
-                        <a:defRPr sz="1150" b="1">
-                          <a:solidFill>
-                            <a:srgbClr val="0D9488"/>
-                          </a:solidFill>
-                          <a:latin typeface="Calibri"/>
-                        </a:defRPr>
-                      </a:pPr>
-                      <a:r>
-                        <a:t>0.698</a:t>
-                      </a:r>
-                    </a:p>
-                  </a:txBody>
-                  <a:tcPr anchor="ctr">
-                    <a:solidFill>
-                      <a:srgbClr val="F0FDFA"/>
-                    </a:solidFill>
-                  </a:tcPr>
-                </a:tc>
-              </a:tr>
-              <a:tr h="496392">
-                <a:tc>
-                  <a:txBody>
-                    <a:bodyPr/>
-                    <a:lstStyle/>
-                    <a:p>
-                      <a:pPr>
-                        <a:defRPr sz="1150" b="1">
+                        <a:defRPr sz="1300" b="1">
                           <a:solidFill>
                             <a:srgbClr val="0F172A"/>
                           </a:solidFill>
@@ -10094,7 +9104,7 @@
                     <a:lstStyle/>
                     <a:p>
                       <a:pPr>
-                        <a:defRPr sz="1150" b="1">
+                        <a:defRPr sz="1300" b="1">
                           <a:solidFill>
                             <a:srgbClr val="0F172A"/>
                           </a:solidFill>
@@ -10118,7 +9128,7 @@
                     <a:lstStyle/>
                     <a:p>
                       <a:pPr>
-                        <a:defRPr sz="1150" b="1">
+                        <a:defRPr sz="1300" b="1">
                           <a:solidFill>
                             <a:srgbClr val="0D9488"/>
                           </a:solidFill>
@@ -10142,7 +9152,7 @@
                     <a:lstStyle/>
                     <a:p>
                       <a:pPr>
-                        <a:defRPr sz="1150" b="1">
+                        <a:defRPr sz="1300" b="1">
                           <a:solidFill>
                             <a:srgbClr val="0D9488"/>
                           </a:solidFill>
@@ -10160,30 +9170,6 @@
                     </a:solidFill>
                   </a:tcPr>
                 </a:tc>
-                <a:tc>
-                  <a:txBody>
-                    <a:bodyPr/>
-                    <a:lstStyle/>
-                    <a:p>
-                      <a:pPr>
-                        <a:defRPr sz="1150" b="1">
-                          <a:solidFill>
-                            <a:srgbClr val="0D9488"/>
-                          </a:solidFill>
-                          <a:latin typeface="Calibri"/>
-                        </a:defRPr>
-                      </a:pPr>
-                      <a:r>
-                        <a:t>0.696</a:t>
-                      </a:r>
-                    </a:p>
-                  </a:txBody>
-                  <a:tcPr anchor="ctr">
-                    <a:solidFill>
-                      <a:srgbClr val="F0FDFA"/>
-                    </a:solidFill>
-                  </a:tcPr>
-                </a:tc>
               </a:tr>
             </a:tbl>
           </a:graphicData>
@@ -10197,12 +9183,12 @@
         </p:nvSpPr>
         <p:spPr>
           <a:xfrm>
-            <a:off x="7406640" y="1325880"/>
-            <a:ext cx="4206240" cy="3474720"/>
+            <a:off x="7132320" y="1463040"/>
+            <a:ext cx="4389120" cy="3291840"/>
           </a:xfrm>
           <a:prstGeom prst="roundRect">
             <a:avLst>
-              <a:gd name="adj" fmla="val 2000"/>
+              <a:gd name="adj" fmla="val 2500"/>
             </a:avLst>
           </a:prstGeom>
           <a:solidFill>
@@ -10244,8 +9230,8 @@
         </p:nvSpPr>
         <p:spPr>
           <a:xfrm>
-            <a:off x="7406640" y="1399032"/>
-            <a:ext cx="73152" cy="3328415"/>
+            <a:off x="7132320" y="1554480"/>
+            <a:ext cx="82296" cy="3108960"/>
           </a:xfrm>
           <a:prstGeom prst="rect">
             <a:avLst/>
@@ -10287,8 +9273,8 @@
         </p:nvSpPr>
         <p:spPr>
           <a:xfrm>
-            <a:off x="7607808" y="1453895"/>
-            <a:ext cx="3886200" cy="3255263"/>
+            <a:off x="7388352" y="1645920"/>
+            <a:ext cx="3977639" cy="2971800"/>
           </a:xfrm>
           <a:prstGeom prst="rect">
             <a:avLst/>
@@ -10303,9 +9289,9 @@
           <a:p>
             <a:pPr>
               <a:spcAft>
-                <a:spcPts val="600"/>
+                <a:spcPts val="1000"/>
               </a:spcAft>
-              <a:defRPr sz="1600" b="1">
+              <a:defRPr sz="1900" b="1">
                 <a:solidFill>
                   <a:srgbClr val="2563EB"/>
                 </a:solidFill>
@@ -10313,119 +9299,119 @@
               </a:defRPr>
             </a:pPr>
             <a:r>
-              <a:t>Sample Efficiency (Q2 Learning Curve)</a:t>
+              <a:t>Sample Efficiency (QLoRA)</a:t>
             </a:r>
           </a:p>
           <a:p>
             <a:pPr>
               <a:spcAft>
-                <a:spcPts val="400"/>
+                <a:spcPts val="800"/>
               </a:spcAft>
               <a:defRPr>
                 <a:latin typeface="Calibri"/>
               </a:defRPr>
             </a:pPr>
             <a:r>
-              <a:rPr b="1" sz="1300">
+              <a:rPr b="1" sz="1500">
                 <a:solidFill>
                   <a:srgbClr val="0F172A"/>
                 </a:solidFill>
                 <a:latin typeface="Calibri"/>
               </a:rPr>
-              <a:t>• N = 250 docs (1.3%): </a:t>
-            </a:r>
-            <a:r>
-              <a:rPr b="0" sz="1300">
+              <a:t>• 250 docs (1.3%): </a:t>
+            </a:r>
+            <a:r>
+              <a:rPr b="0" sz="1500">
                 <a:solidFill>
                   <a:srgbClr val="334155"/>
                 </a:solidFill>
                 <a:latin typeface="Calibri"/>
               </a:rPr>
-              <a:t>0.512 C2 Micro-F1 — already beats 10-shot prompting (0.453)!</a:t>
+              <a:t>0.512 F1 (already beats 10-shot!)</a:t>
             </a:r>
           </a:p>
           <a:p>
             <a:pPr>
               <a:spcAft>
-                <a:spcPts val="400"/>
+                <a:spcPts val="800"/>
               </a:spcAft>
               <a:defRPr>
                 <a:latin typeface="Calibri"/>
               </a:defRPr>
             </a:pPr>
             <a:r>
-              <a:rPr b="1" sz="1300">
+              <a:rPr b="1" sz="1500">
                 <a:solidFill>
                   <a:srgbClr val="0F172A"/>
                 </a:solidFill>
                 <a:latin typeface="Calibri"/>
               </a:rPr>
-              <a:t>• N = 1,000 docs (5.1%): </a:t>
-            </a:r>
-            <a:r>
-              <a:rPr b="0" sz="1300">
+              <a:t>• 1,000 docs (5.1%): </a:t>
+            </a:r>
+            <a:r>
+              <a:rPr b="0" sz="1500">
                 <a:solidFill>
                   <a:srgbClr val="334155"/>
                 </a:solidFill>
                 <a:latin typeface="Calibri"/>
               </a:rPr>
-              <a:t>0.609 C2 Micro-F1 — trains in &lt;5 minutes on Colab L4.</a:t>
+              <a:t>0.609 F1 (~5 min on Colab L4)</a:t>
             </a:r>
           </a:p>
           <a:p>
             <a:pPr>
               <a:spcAft>
-                <a:spcPts val="400"/>
+                <a:spcPts val="800"/>
               </a:spcAft>
               <a:defRPr>
                 <a:latin typeface="Calibri"/>
               </a:defRPr>
             </a:pPr>
             <a:r>
-              <a:rPr b="1" sz="1300">
+              <a:rPr b="1" sz="1500">
                 <a:solidFill>
                   <a:srgbClr val="0F172A"/>
                 </a:solidFill>
                 <a:latin typeface="Calibri"/>
               </a:rPr>
-              <a:t>• N = 5,000 docs (25.7%): </a:t>
-            </a:r>
-            <a:r>
-              <a:rPr b="0" sz="1300">
+              <a:t>• 5,000 docs (25.7%): </a:t>
+            </a:r>
+            <a:r>
+              <a:rPr b="0" sz="1500">
                 <a:solidFill>
                   <a:srgbClr val="334155"/>
                 </a:solidFill>
                 <a:latin typeface="Calibri"/>
               </a:rPr>
-              <a:t>0.684 C2 Micro-F1 — captures 95% of full-data performance.</a:t>
+              <a:t>0.684 F1 (95% of full performance)</a:t>
             </a:r>
           </a:p>
           <a:p>
             <a:pPr>
               <a:spcAft>
-                <a:spcPts val="400"/>
+                <a:spcPts val="800"/>
               </a:spcAft>
               <a:defRPr>
                 <a:latin typeface="Calibri"/>
               </a:defRPr>
             </a:pPr>
             <a:r>
-              <a:rPr b="1" sz="1300">
+              <a:rPr b="1" sz="1500">
                 <a:solidFill>
                   <a:srgbClr val="0F172A"/>
                 </a:solidFill>
                 <a:latin typeface="Calibri"/>
               </a:rPr>
-              <a:t>• N = 19,432 docs (100%): </a:t>
-            </a:r>
-            <a:r>
-              <a:rPr b="0" sz="1300">
+              <a:t>• 19,432 docs (100%): </a:t>
+            </a:r>
+            <a:r>
+              <a:rPr b="0" sz="1500">
                 <a:solidFill>
                   <a:srgbClr val="334155"/>
                 </a:solidFill>
                 <a:latin typeface="Calibri"/>
               </a:rPr>
-              <a:t>0.719 C2 Micro-F1 — full convergence across all 19 categories.</a:t>
+              <a:t>0.719 F1 (full convergence)</a:t>
             </a:r>
           </a:p>
         </p:txBody>
@@ -10438,12 +9424,12 @@
         </p:nvSpPr>
         <p:spPr>
           <a:xfrm>
-            <a:off x="548640" y="4983480"/>
-            <a:ext cx="11064240" cy="1463040"/>
+            <a:off x="640080" y="4983480"/>
+            <a:ext cx="10881360" cy="1325880"/>
           </a:xfrm>
           <a:prstGeom prst="roundRect">
             <a:avLst>
-              <a:gd name="adj" fmla="val 2000"/>
+              <a:gd name="adj" fmla="val 2500"/>
             </a:avLst>
           </a:prstGeom>
           <a:solidFill>
@@ -10485,8 +9471,8 @@
         </p:nvSpPr>
         <p:spPr>
           <a:xfrm>
-            <a:off x="548640" y="5056632"/>
-            <a:ext cx="73152" cy="1316736"/>
+            <a:off x="640080" y="5074920"/>
+            <a:ext cx="82296" cy="1143000"/>
           </a:xfrm>
           <a:prstGeom prst="rect">
             <a:avLst/>
@@ -10528,8 +9514,8 @@
         </p:nvSpPr>
         <p:spPr>
           <a:xfrm>
-            <a:off x="749808" y="5111496"/>
-            <a:ext cx="10744200" cy="1243584"/>
+            <a:off x="896112" y="5166360"/>
+            <a:ext cx="10469880" cy="1005840"/>
           </a:xfrm>
           <a:prstGeom prst="rect">
             <a:avLst/>
@@ -10544,9 +9530,9 @@
           <a:p>
             <a:pPr>
               <a:spcAft>
-                <a:spcPts val="600"/>
+                <a:spcPts val="1000"/>
               </a:spcAft>
-              <a:defRPr sz="1500" b="1">
+              <a:defRPr sz="1600" b="1">
                 <a:solidFill>
                   <a:srgbClr val="0F172A"/>
                 </a:solidFill>
@@ -10554,91 +9540,35 @@
               </a:defRPr>
             </a:pPr>
             <a:r>
-              <a:t>Summary of Core Concepts</a:t>
+              <a:t>Takeaway</a:t>
             </a:r>
           </a:p>
           <a:p>
             <a:pPr>
               <a:spcAft>
-                <a:spcPts val="400"/>
+                <a:spcPts val="800"/>
               </a:spcAft>
               <a:defRPr>
                 <a:latin typeface="Calibri"/>
               </a:defRPr>
             </a:pPr>
             <a:r>
-              <a:rPr b="1" sz="1200">
+              <a:rPr b="1" sz="1400">
                 <a:solidFill>
                   <a:srgbClr val="0F172A"/>
                 </a:solidFill>
                 <a:latin typeface="Calibri"/>
               </a:rPr>
-              <a:t>• 1. Data &amp; Loss Masking: </a:t>
-            </a:r>
-            <a:r>
-              <a:rPr b="0" sz="1200">
+              <a:t>• Data + Adapters + Quantization: </a:t>
+            </a:r>
+            <a:r>
+              <a:rPr b="0" sz="1400">
                 <a:solidFill>
                   <a:srgbClr val="334155"/>
                 </a:solidFill>
                 <a:latin typeface="Calibri"/>
               </a:rPr>
-              <a:t>Deterministic JSON targets + Completion-Only Loss (labels = -100 on prompt tokens) focus 100% of gradient updates on structured prediction.</a:t>
-            </a:r>
-          </a:p>
-          <a:p>
-            <a:pPr>
-              <a:spcAft>
-                <a:spcPts val="400"/>
-              </a:spcAft>
-              <a:defRPr>
-                <a:latin typeface="Calibri"/>
-              </a:defRPr>
-            </a:pPr>
-            <a:r>
-              <a:rPr b="1" sz="1200">
-                <a:solidFill>
-                  <a:srgbClr val="0F172A"/>
-                </a:solidFill>
-                <a:latin typeface="Calibri"/>
-              </a:rPr>
-              <a:t>• 2. Low-Rank Adapters (LoRA): </a:t>
-            </a:r>
-            <a:r>
-              <a:rPr b="0" sz="1200">
-                <a:solidFill>
-                  <a:srgbClr val="334155"/>
-                </a:solidFill>
-                <a:latin typeface="Calibri"/>
-              </a:rPr>
-              <a:t>Training just 0.79% of parameters (r=16 across all 7 attention/MLP projections) unlocks +26.7 Micro-F1 over 10-shot prompting.</a:t>
-            </a:r>
-          </a:p>
-          <a:p>
-            <a:pPr>
-              <a:spcAft>
-                <a:spcPts val="400"/>
-              </a:spcAft>
-              <a:defRPr>
-                <a:latin typeface="Calibri"/>
-              </a:defRPr>
-            </a:pPr>
-            <a:r>
-              <a:rPr b="1" sz="1200">
-                <a:solidFill>
-                  <a:srgbClr val="0F172A"/>
-                </a:solidFill>
-                <a:latin typeface="Calibri"/>
-              </a:rPr>
-              <a:t>• 3. 4-Bit NF4 Quantization (QLoRA): </a:t>
-            </a:r>
-            <a:r>
-              <a:rPr b="0" sz="1200">
-                <a:solidFill>
-                  <a:srgbClr val="334155"/>
-                </a:solidFill>
-                <a:latin typeface="Calibri"/>
-              </a:rPr>
-              <a:t>Cuts peak training VRAM from 7.2 GB to 2.9 GB with virtually zero accuracy loss (0.7191 vs. 0.7204 F1).</a:t>
+              <a:t>Completion-masked JSON SFT + rank-16 LoRA + 4-bit NF4 quantization delivers a +26.7 F1 gain over 10-shot prompting in under 3 GB of GPU memory.</a:t>
             </a:r>
           </a:p>
         </p:txBody>

--- a/docs/gemma_qlora_core_concepts.pptx
+++ b/docs/gemma_qlora_core_concepts.pptx
@@ -3840,7 +3840,7 @@
                 </a:solidFill>
                 <a:latin typeface="Calibri"/>
               </a:rPr>
-              <a:t>• Uncalibrated Output: </a:t>
+              <a:t>• Accuracy Ceiling: </a:t>
             </a:r>
             <a:r>
               <a:rPr b="0" sz="1500">
@@ -3849,7 +3849,7 @@
                 </a:solidFill>
                 <a:latin typeface="Calibri"/>
               </a:rPr>
-              <a:t>Zero-shot struggles with multi-label sets and out-of-domain posts.</a:t>
+              <a:t>Zero-shot reaches 0.587 C2 F1; even 10-shot plateaus at 0.703 F1.</a:t>
             </a:r>
           </a:p>
           <a:p>
@@ -3868,7 +3868,7 @@
                 </a:solidFill>
                 <a:latin typeface="Calibri"/>
               </a:rPr>
-              <a:t>• Slow Few-Shot: </a:t>
+              <a:t>• High Token Cost: </a:t>
             </a:r>
             <a:r>
               <a:rPr b="0" sz="1500">
@@ -3877,7 +3877,7 @@
                 </a:solidFill>
                 <a:latin typeface="Calibri"/>
               </a:rPr>
-              <a:t>10-shot adds ~1,500 tokens to every query (2x slower inference).</a:t>
+              <a:t>10-shot prepends ~1,760 tokens per document (2.7x more tokens).</a:t>
             </a:r>
           </a:p>
         </p:txBody>
@@ -4238,7 +4238,7 @@
                 </a:solidFill>
                 <a:latin typeface="Calibri"/>
               </a:rPr>
-              <a:t>• +26.7 F1 over 10-Shot: </a:t>
+              <a:t>• +14.5 F1 over 10-Shot: </a:t>
             </a:r>
             <a:r>
               <a:rPr b="0" sz="1500">
@@ -4247,7 +4247,7 @@
                 </a:solidFill>
                 <a:latin typeface="Calibri"/>
               </a:rPr>
-              <a:t>Jumps from 0.258 (0-shot) &amp; 0.453 (10-shot) to 0.720 Micro-F1.</a:t>
+              <a:t>Jumps from 0.587 (0-shot) &amp; 0.703 (10-shot) to 0.849 Micro-F1.</a:t>
             </a:r>
           </a:p>
           <a:p>
@@ -5401,7 +5401,7 @@
               </a:defRPr>
             </a:pPr>
             <a:r>
-              <a:t>Tokens : &lt;bos&gt; &lt;start_of_turn&gt;user ... [~860 Prompt Tokens] ... &lt;start_of_turn&gt;model\n {"labels": ["Zugfahrt:negative"]} &lt;end_of_turn&gt;</a:t>
+              <a:t>Tokens : &lt;bos&gt; &lt;start_of_turn&gt;user ... [~660 Prompt Tokens] ... &lt;start_of_turn&gt;model\n {"labels": ["Zugfahrt:negative"]} &lt;end_of_turn&gt;</a:t>
             </a:r>
           </a:p>
           <a:p>
@@ -5578,7 +5578,7 @@
               </a:defRPr>
             </a:pPr>
             <a:r>
-              <a:t>The 50:1 Token Asymmetry Problem</a:t>
+              <a:t>The 35:1 Token Asymmetry Problem</a:t>
             </a:r>
           </a:p>
           <a:p>
@@ -5597,7 +5597,7 @@
                 </a:solidFill>
                 <a:latin typeface="Calibri"/>
               </a:rPr>
-              <a:t>• Long Prompt (~860 tokens): </a:t>
+              <a:t>• Long Prompt (~660 tokens): </a:t>
             </a:r>
             <a:r>
               <a:rPr b="0" sz="1500">
@@ -8174,7 +8174,7 @@
                         </a:defRPr>
                       </a:pPr>
                       <a:r>
-                        <a:t>0.7204 (100% Valid JSON)</a:t>
+                        <a:t>0.8486 Strict / 0.7370 Java</a:t>
                       </a:r>
                     </a:p>
                   </a:txBody>
@@ -8198,7 +8198,7 @@
                         </a:defRPr>
                       </a:pPr>
                       <a:r>
-                        <a:t>0.7191 (100% Valid JSON)</a:t>
+                        <a:t>0.8360 Strict / 0.7182 Java</a:t>
                       </a:r>
                     </a:p>
                   </a:txBody>
@@ -8365,7 +8365,7 @@
                 </a:solidFill>
                 <a:latin typeface="Calibri"/>
               </a:rPr>
-              <a:t>Switch seamlessly between 4-bit QLoRA (2.9 GB VRAM) and 16-bit LoRA (7.2 GB VRAM) with identical ~0.720 F1.</a:t>
+              <a:t>Switch seamlessly between 4-bit QLoRA (2.9 GB VRAM) and 16-bit LoRA (7.2 GB VRAM) with &lt;1.3% F1 difference.</a:t>
             </a:r>
           </a:p>
         </p:txBody>
@@ -8598,7 +8598,7 @@
                         </a:defRPr>
                       </a:pPr>
                       <a:r>
-                        <a:t>Method</a:t>
+                        <a:t>Method (test_syn)</a:t>
                       </a:r>
                     </a:p>
                   </a:txBody>
@@ -8646,7 +8646,7 @@
                         </a:defRPr>
                       </a:pPr>
                       <a:r>
-                        <a:t>C1 Micro-F1</a:t>
+                        <a:t>C1 Strict F1</a:t>
                       </a:r>
                     </a:p>
                   </a:txBody>
@@ -8670,7 +8670,7 @@
                         </a:defRPr>
                       </a:pPr>
                       <a:r>
-                        <a:t>C2 Micro-F1</a:t>
+                        <a:t>C2 Strict F1</a:t>
                       </a:r>
                     </a:p>
                   </a:txBody>
@@ -8720,7 +8720,7 @@
                         </a:defRPr>
                       </a:pPr>
                       <a:r>
-                        <a:t>91.4%</a:t>
+                        <a:t>98.1%</a:t>
                       </a:r>
                     </a:p>
                   </a:txBody>
@@ -8744,7 +8744,7 @@
                         </a:defRPr>
                       </a:pPr>
                       <a:r>
-                        <a:t>0.312</a:t>
+                        <a:t>0.555</a:t>
                       </a:r>
                     </a:p>
                   </a:txBody>
@@ -8768,7 +8768,7 @@
                         </a:defRPr>
                       </a:pPr>
                       <a:r>
-                        <a:t>0.214</a:t>
+                        <a:t>0.464</a:t>
                       </a:r>
                     </a:p>
                   </a:txBody>
@@ -8818,7 +8818,7 @@
                         </a:defRPr>
                       </a:pPr>
                       <a:r>
-                        <a:t>95.8%</a:t>
+                        <a:t>99.7%</a:t>
                       </a:r>
                     </a:p>
                   </a:txBody>
@@ -8842,7 +8842,7 @@
                         </a:defRPr>
                       </a:pPr>
                       <a:r>
-                        <a:t>0.368</a:t>
+                        <a:t>0.668</a:t>
                       </a:r>
                     </a:p>
                   </a:txBody>
@@ -8866,7 +8866,7 @@
                         </a:defRPr>
                       </a:pPr>
                       <a:r>
-                        <a:t>0.258</a:t>
+                        <a:t>0.587</a:t>
                       </a:r>
                     </a:p>
                   </a:txBody>
@@ -8916,7 +8916,7 @@
                         </a:defRPr>
                       </a:pPr>
                       <a:r>
-                        <a:t>99.4%</a:t>
+                        <a:t>100.0%</a:t>
                       </a:r>
                     </a:p>
                   </a:txBody>
@@ -8940,7 +8940,7 @@
                         </a:defRPr>
                       </a:pPr>
                       <a:r>
-                        <a:t>0.569</a:t>
+                        <a:t>0.767</a:t>
                       </a:r>
                     </a:p>
                   </a:txBody>
@@ -8964,7 +8964,7 @@
                         </a:defRPr>
                       </a:pPr>
                       <a:r>
-                        <a:t>0.453</a:t>
+                        <a:t>0.703</a:t>
                       </a:r>
                     </a:p>
                   </a:txBody>
@@ -9038,7 +9038,7 @@
                         </a:defRPr>
                       </a:pPr>
                       <a:r>
-                        <a:t>0.781</a:t>
+                        <a:t>0.882</a:t>
                       </a:r>
                     </a:p>
                   </a:txBody>
@@ -9062,7 +9062,7 @@
                         </a:defRPr>
                       </a:pPr>
                       <a:r>
-                        <a:t>0.720</a:t>
+                        <a:t>0.849</a:t>
                       </a:r>
                     </a:p>
                   </a:txBody>
@@ -9136,7 +9136,7 @@
                         </a:defRPr>
                       </a:pPr>
                       <a:r>
-                        <a:t>0.779</a:t>
+                        <a:t>0.873</a:t>
                       </a:r>
                     </a:p>
                   </a:txBody>
@@ -9160,7 +9160,7 @@
                         </a:defRPr>
                       </a:pPr>
                       <a:r>
-                        <a:t>0.719</a:t>
+                        <a:t>0.836</a:t>
                       </a:r>
                     </a:p>
                   </a:txBody>
@@ -9327,7 +9327,7 @@
                 </a:solidFill>
                 <a:latin typeface="Calibri"/>
               </a:rPr>
-              <a:t>0.512 F1 (already beats 10-shot!)</a:t>
+              <a:t>0.648 F1 (beats 2-shot prompting)</a:t>
             </a:r>
           </a:p>
           <a:p>
@@ -9355,7 +9355,7 @@
                 </a:solidFill>
                 <a:latin typeface="Calibri"/>
               </a:rPr>
-              <a:t>0.609 F1 (~5 min on Colab L4)</a:t>
+              <a:t>0.701 F1 (matches 10-shot in 1.6 min)</a:t>
             </a:r>
           </a:p>
           <a:p>
@@ -9374,7 +9374,7 @@
                 </a:solidFill>
                 <a:latin typeface="Calibri"/>
               </a:rPr>
-              <a:t>• 5,000 docs (25.7%): </a:t>
+              <a:t>• 2,000 docs (10.3%): </a:t>
             </a:r>
             <a:r>
               <a:rPr b="0" sz="1500">
@@ -9383,7 +9383,7 @@
                 </a:solidFill>
                 <a:latin typeface="Calibri"/>
               </a:rPr>
-              <a:t>0.684 F1 (95% of full performance)</a:t>
+              <a:t>0.722 F1 (surpasses 10-shot)</a:t>
             </a:r>
           </a:p>
           <a:p>
@@ -9411,7 +9411,7 @@
                 </a:solidFill>
                 <a:latin typeface="Calibri"/>
               </a:rPr>
-              <a:t>0.719 F1 (full convergence)</a:t>
+              <a:t>0.836 F1 (+13.3 F1 over 10-shot)</a:t>
             </a:r>
           </a:p>
         </p:txBody>
@@ -9568,7 +9568,7 @@
                 </a:solidFill>
                 <a:latin typeface="Calibri"/>
               </a:rPr>
-              <a:t>Completion-masked JSON SFT + rank-16 LoRA + 4-bit NF4 quantization delivers a +26.7 F1 gain over 10-shot prompting in under 3 GB of GPU memory.</a:t>
+              <a:t>Completion-masked JSON SFT + rank-16 LoRA + 4-bit NF4 quantization delivers +14.5 F1 over 10-shot prompting in under 3 GB of GPU memory.</a:t>
             </a:r>
           </a:p>
         </p:txBody>
